--- a/project/stage04/Projekt hurtowni danych.pptx
+++ b/project/stage04/Projekt hurtowni danych.pptx
@@ -4,6 +4,9 @@
   <p:sldMasterIdLst>
     <p:sldMasterId id="2147483648" r:id="rId1"/>
   </p:sldMasterIdLst>
+  <p:notesMasterIdLst>
+    <p:notesMasterId r:id="rId9"/>
+  </p:notesMasterIdLst>
   <p:sldIdLst>
     <p:sldId id="256" r:id="rId2"/>
     <p:sldId id="257" r:id="rId3"/>
@@ -110,7 +113,446 @@
       </a:defRPr>
     </a:lvl9pPr>
   </p:defaultTextStyle>
+  <p:extLst>
+    <p:ext uri="{EFAFB233-063F-42B5-8137-9DF3F51BA10A}">
+      <p15:sldGuideLst xmlns:p15="http://schemas.microsoft.com/office/powerpoint/2012/main"/>
+    </p:ext>
+  </p:extLst>
 </p:presentation>
+</file>
+
+<file path=ppt/notesMasters/notesMaster1.xml><?xml version="1.0" encoding="utf-8"?>
+<p:notesMaster xmlns:a="http://schemas.openxmlformats.org/drawingml/2006/main" xmlns:r="http://schemas.openxmlformats.org/officeDocument/2006/relationships" xmlns:p="http://schemas.openxmlformats.org/presentationml/2006/main">
+  <p:cSld>
+    <p:bg>
+      <p:bgRef idx="1001">
+        <a:schemeClr val="bg1"/>
+      </p:bgRef>
+    </p:bg>
+    <p:spTree>
+      <p:nvGrpSpPr>
+        <p:cNvPr id="1" name=""/>
+        <p:cNvGrpSpPr/>
+        <p:nvPr/>
+      </p:nvGrpSpPr>
+      <p:grpSpPr>
+        <a:xfrm>
+          <a:off x="0" y="0"/>
+          <a:ext cx="0" cy="0"/>
+          <a:chOff x="0" y="0"/>
+          <a:chExt cx="0" cy="0"/>
+        </a:xfrm>
+      </p:grpSpPr>
+      <p:sp>
+        <p:nvSpPr>
+          <p:cNvPr id="2" name="Header Placeholder 1"/>
+          <p:cNvSpPr>
+            <a:spLocks noGrp="1"/>
+          </p:cNvSpPr>
+          <p:nvPr>
+            <p:ph type="hdr" sz="quarter"/>
+          </p:nvPr>
+        </p:nvSpPr>
+        <p:spPr>
+          <a:xfrm>
+            <a:off x="0" y="0"/>
+            <a:ext cx="2971800" cy="458788"/>
+          </a:xfrm>
+          <a:prstGeom prst="rect">
+            <a:avLst/>
+          </a:prstGeom>
+        </p:spPr>
+        <p:txBody>
+          <a:bodyPr vert="horz" lIns="91440" tIns="45720" rIns="91440" bIns="45720" rtlCol="0"/>
+          <a:lstStyle>
+            <a:lvl1pPr algn="l">
+              <a:defRPr sz="1200"/>
+            </a:lvl1pPr>
+          </a:lstStyle>
+          <a:p>
+            <a:endParaRPr lang="pl-PL"/>
+          </a:p>
+        </p:txBody>
+      </p:sp>
+      <p:sp>
+        <p:nvSpPr>
+          <p:cNvPr id="3" name="Date Placeholder 2"/>
+          <p:cNvSpPr>
+            <a:spLocks noGrp="1"/>
+          </p:cNvSpPr>
+          <p:nvPr>
+            <p:ph type="dt" idx="1"/>
+          </p:nvPr>
+        </p:nvSpPr>
+        <p:spPr>
+          <a:xfrm>
+            <a:off x="3884613" y="0"/>
+            <a:ext cx="2971800" cy="458788"/>
+          </a:xfrm>
+          <a:prstGeom prst="rect">
+            <a:avLst/>
+          </a:prstGeom>
+        </p:spPr>
+        <p:txBody>
+          <a:bodyPr vert="horz" lIns="91440" tIns="45720" rIns="91440" bIns="45720" rtlCol="0"/>
+          <a:lstStyle>
+            <a:lvl1pPr algn="r">
+              <a:defRPr sz="1200"/>
+            </a:lvl1pPr>
+          </a:lstStyle>
+          <a:p>
+            <a:fld id="{92FC5259-D95D-4037-B609-31DA83D4458D}" type="datetimeFigureOut">
+              <a:rPr lang="pl-PL" smtClean="0"/>
+              <a:t>15.06.2025</a:t>
+            </a:fld>
+            <a:endParaRPr lang="pl-PL"/>
+          </a:p>
+        </p:txBody>
+      </p:sp>
+      <p:sp>
+        <p:nvSpPr>
+          <p:cNvPr id="4" name="Slide Image Placeholder 3"/>
+          <p:cNvSpPr>
+            <a:spLocks noGrp="1" noRot="1" noChangeAspect="1"/>
+          </p:cNvSpPr>
+          <p:nvPr>
+            <p:ph type="sldImg" idx="2"/>
+          </p:nvPr>
+        </p:nvSpPr>
+        <p:spPr>
+          <a:xfrm>
+            <a:off x="685800" y="1143000"/>
+            <a:ext cx="5486400" cy="3086100"/>
+          </a:xfrm>
+          <a:prstGeom prst="rect">
+            <a:avLst/>
+          </a:prstGeom>
+          <a:noFill/>
+          <a:ln w="12700">
+            <a:solidFill>
+              <a:prstClr val="black"/>
+            </a:solidFill>
+          </a:ln>
+        </p:spPr>
+        <p:txBody>
+          <a:bodyPr vert="horz" lIns="91440" tIns="45720" rIns="91440" bIns="45720" rtlCol="0" anchor="ctr"/>
+          <a:lstStyle/>
+          <a:p>
+            <a:endParaRPr lang="pl-PL"/>
+          </a:p>
+        </p:txBody>
+      </p:sp>
+      <p:sp>
+        <p:nvSpPr>
+          <p:cNvPr id="5" name="Notes Placeholder 4"/>
+          <p:cNvSpPr>
+            <a:spLocks noGrp="1"/>
+          </p:cNvSpPr>
+          <p:nvPr>
+            <p:ph type="body" sz="quarter" idx="3"/>
+          </p:nvPr>
+        </p:nvSpPr>
+        <p:spPr>
+          <a:xfrm>
+            <a:off x="685800" y="4400550"/>
+            <a:ext cx="5486400" cy="3600450"/>
+          </a:xfrm>
+          <a:prstGeom prst="rect">
+            <a:avLst/>
+          </a:prstGeom>
+        </p:spPr>
+        <p:txBody>
+          <a:bodyPr vert="horz" lIns="91440" tIns="45720" rIns="91440" bIns="45720" rtlCol="0"/>
+          <a:lstStyle/>
+          <a:p>
+            <a:pPr lvl="0"/>
+            <a:r>
+              <a:rPr lang="en-US"/>
+              <a:t>Click to edit Master text styles</a:t>
+            </a:r>
+          </a:p>
+          <a:p>
+            <a:pPr lvl="1"/>
+            <a:r>
+              <a:rPr lang="en-US"/>
+              <a:t>Second level</a:t>
+            </a:r>
+          </a:p>
+          <a:p>
+            <a:pPr lvl="2"/>
+            <a:r>
+              <a:rPr lang="en-US"/>
+              <a:t>Third level</a:t>
+            </a:r>
+          </a:p>
+          <a:p>
+            <a:pPr lvl="3"/>
+            <a:r>
+              <a:rPr lang="en-US"/>
+              <a:t>Fourth level</a:t>
+            </a:r>
+          </a:p>
+          <a:p>
+            <a:pPr lvl="4"/>
+            <a:r>
+              <a:rPr lang="en-US"/>
+              <a:t>Fifth level</a:t>
+            </a:r>
+            <a:endParaRPr lang="pl-PL"/>
+          </a:p>
+        </p:txBody>
+      </p:sp>
+      <p:sp>
+        <p:nvSpPr>
+          <p:cNvPr id="6" name="Footer Placeholder 5"/>
+          <p:cNvSpPr>
+            <a:spLocks noGrp="1"/>
+          </p:cNvSpPr>
+          <p:nvPr>
+            <p:ph type="ftr" sz="quarter" idx="4"/>
+          </p:nvPr>
+        </p:nvSpPr>
+        <p:spPr>
+          <a:xfrm>
+            <a:off x="0" y="8685213"/>
+            <a:ext cx="2971800" cy="458787"/>
+          </a:xfrm>
+          <a:prstGeom prst="rect">
+            <a:avLst/>
+          </a:prstGeom>
+        </p:spPr>
+        <p:txBody>
+          <a:bodyPr vert="horz" lIns="91440" tIns="45720" rIns="91440" bIns="45720" rtlCol="0" anchor="b"/>
+          <a:lstStyle>
+            <a:lvl1pPr algn="l">
+              <a:defRPr sz="1200"/>
+            </a:lvl1pPr>
+          </a:lstStyle>
+          <a:p>
+            <a:endParaRPr lang="pl-PL"/>
+          </a:p>
+        </p:txBody>
+      </p:sp>
+      <p:sp>
+        <p:nvSpPr>
+          <p:cNvPr id="7" name="Slide Number Placeholder 6"/>
+          <p:cNvSpPr>
+            <a:spLocks noGrp="1"/>
+          </p:cNvSpPr>
+          <p:nvPr>
+            <p:ph type="sldNum" sz="quarter" idx="5"/>
+          </p:nvPr>
+        </p:nvSpPr>
+        <p:spPr>
+          <a:xfrm>
+            <a:off x="3884613" y="8685213"/>
+            <a:ext cx="2971800" cy="458787"/>
+          </a:xfrm>
+          <a:prstGeom prst="rect">
+            <a:avLst/>
+          </a:prstGeom>
+        </p:spPr>
+        <p:txBody>
+          <a:bodyPr vert="horz" lIns="91440" tIns="45720" rIns="91440" bIns="45720" rtlCol="0" anchor="b"/>
+          <a:lstStyle>
+            <a:lvl1pPr algn="r">
+              <a:defRPr sz="1200"/>
+            </a:lvl1pPr>
+          </a:lstStyle>
+          <a:p>
+            <a:fld id="{028B4CE3-0D44-4C07-90A8-72C114EE772D}" type="slidenum">
+              <a:rPr lang="pl-PL" smtClean="0"/>
+              <a:t>‹#›</a:t>
+            </a:fld>
+            <a:endParaRPr lang="pl-PL"/>
+          </a:p>
+        </p:txBody>
+      </p:sp>
+    </p:spTree>
+    <p:extLst>
+      <p:ext uri="{BB962C8B-B14F-4D97-AF65-F5344CB8AC3E}">
+        <p14:creationId xmlns:p14="http://schemas.microsoft.com/office/powerpoint/2010/main" val="978930489"/>
+      </p:ext>
+    </p:extLst>
+  </p:cSld>
+  <p:clrMap bg1="lt1" tx1="dk1" bg2="lt2" tx2="dk2" accent1="accent1" accent2="accent2" accent3="accent3" accent4="accent4" accent5="accent5" accent6="accent6" hlink="hlink" folHlink="folHlink"/>
+  <p:notesStyle>
+    <a:lvl1pPr marL="0" algn="l" defTabSz="914400" rtl="0" eaLnBrk="1" latinLnBrk="0" hangingPunct="1">
+      <a:defRPr sz="1200" kern="1200">
+        <a:solidFill>
+          <a:schemeClr val="tx1"/>
+        </a:solidFill>
+        <a:latin typeface="+mn-lt"/>
+        <a:ea typeface="+mn-ea"/>
+        <a:cs typeface="+mn-cs"/>
+      </a:defRPr>
+    </a:lvl1pPr>
+    <a:lvl2pPr marL="457200" algn="l" defTabSz="914400" rtl="0" eaLnBrk="1" latinLnBrk="0" hangingPunct="1">
+      <a:defRPr sz="1200" kern="1200">
+        <a:solidFill>
+          <a:schemeClr val="tx1"/>
+        </a:solidFill>
+        <a:latin typeface="+mn-lt"/>
+        <a:ea typeface="+mn-ea"/>
+        <a:cs typeface="+mn-cs"/>
+      </a:defRPr>
+    </a:lvl2pPr>
+    <a:lvl3pPr marL="914400" algn="l" defTabSz="914400" rtl="0" eaLnBrk="1" latinLnBrk="0" hangingPunct="1">
+      <a:defRPr sz="1200" kern="1200">
+        <a:solidFill>
+          <a:schemeClr val="tx1"/>
+        </a:solidFill>
+        <a:latin typeface="+mn-lt"/>
+        <a:ea typeface="+mn-ea"/>
+        <a:cs typeface="+mn-cs"/>
+      </a:defRPr>
+    </a:lvl3pPr>
+    <a:lvl4pPr marL="1371600" algn="l" defTabSz="914400" rtl="0" eaLnBrk="1" latinLnBrk="0" hangingPunct="1">
+      <a:defRPr sz="1200" kern="1200">
+        <a:solidFill>
+          <a:schemeClr val="tx1"/>
+        </a:solidFill>
+        <a:latin typeface="+mn-lt"/>
+        <a:ea typeface="+mn-ea"/>
+        <a:cs typeface="+mn-cs"/>
+      </a:defRPr>
+    </a:lvl4pPr>
+    <a:lvl5pPr marL="1828800" algn="l" defTabSz="914400" rtl="0" eaLnBrk="1" latinLnBrk="0" hangingPunct="1">
+      <a:defRPr sz="1200" kern="1200">
+        <a:solidFill>
+          <a:schemeClr val="tx1"/>
+        </a:solidFill>
+        <a:latin typeface="+mn-lt"/>
+        <a:ea typeface="+mn-ea"/>
+        <a:cs typeface="+mn-cs"/>
+      </a:defRPr>
+    </a:lvl5pPr>
+    <a:lvl6pPr marL="2286000" algn="l" defTabSz="914400" rtl="0" eaLnBrk="1" latinLnBrk="0" hangingPunct="1">
+      <a:defRPr sz="1200" kern="1200">
+        <a:solidFill>
+          <a:schemeClr val="tx1"/>
+        </a:solidFill>
+        <a:latin typeface="+mn-lt"/>
+        <a:ea typeface="+mn-ea"/>
+        <a:cs typeface="+mn-cs"/>
+      </a:defRPr>
+    </a:lvl6pPr>
+    <a:lvl7pPr marL="2743200" algn="l" defTabSz="914400" rtl="0" eaLnBrk="1" latinLnBrk="0" hangingPunct="1">
+      <a:defRPr sz="1200" kern="1200">
+        <a:solidFill>
+          <a:schemeClr val="tx1"/>
+        </a:solidFill>
+        <a:latin typeface="+mn-lt"/>
+        <a:ea typeface="+mn-ea"/>
+        <a:cs typeface="+mn-cs"/>
+      </a:defRPr>
+    </a:lvl7pPr>
+    <a:lvl8pPr marL="3200400" algn="l" defTabSz="914400" rtl="0" eaLnBrk="1" latinLnBrk="0" hangingPunct="1">
+      <a:defRPr sz="1200" kern="1200">
+        <a:solidFill>
+          <a:schemeClr val="tx1"/>
+        </a:solidFill>
+        <a:latin typeface="+mn-lt"/>
+        <a:ea typeface="+mn-ea"/>
+        <a:cs typeface="+mn-cs"/>
+      </a:defRPr>
+    </a:lvl8pPr>
+    <a:lvl9pPr marL="3657600" algn="l" defTabSz="914400" rtl="0" eaLnBrk="1" latinLnBrk="0" hangingPunct="1">
+      <a:defRPr sz="1200" kern="1200">
+        <a:solidFill>
+          <a:schemeClr val="tx1"/>
+        </a:solidFill>
+        <a:latin typeface="+mn-lt"/>
+        <a:ea typeface="+mn-ea"/>
+        <a:cs typeface="+mn-cs"/>
+      </a:defRPr>
+    </a:lvl9pPr>
+  </p:notesStyle>
+</p:notesMaster>
+</file>
+
+<file path=ppt/notesSlides/notesSlide1.xml><?xml version="1.0" encoding="utf-8"?>
+<p:notes xmlns:a="http://schemas.openxmlformats.org/drawingml/2006/main" xmlns:r="http://schemas.openxmlformats.org/officeDocument/2006/relationships" xmlns:p="http://schemas.openxmlformats.org/presentationml/2006/main">
+  <p:cSld>
+    <p:spTree>
+      <p:nvGrpSpPr>
+        <p:cNvPr id="1" name=""/>
+        <p:cNvGrpSpPr/>
+        <p:nvPr/>
+      </p:nvGrpSpPr>
+      <p:grpSpPr>
+        <a:xfrm>
+          <a:off x="0" y="0"/>
+          <a:ext cx="0" cy="0"/>
+          <a:chOff x="0" y="0"/>
+          <a:chExt cx="0" cy="0"/>
+        </a:xfrm>
+      </p:grpSpPr>
+      <p:sp>
+        <p:nvSpPr>
+          <p:cNvPr id="2" name="Slide Image Placeholder 1"/>
+          <p:cNvSpPr>
+            <a:spLocks noGrp="1" noRot="1" noChangeAspect="1"/>
+          </p:cNvSpPr>
+          <p:nvPr>
+            <p:ph type="sldImg"/>
+          </p:nvPr>
+        </p:nvSpPr>
+        <p:spPr/>
+      </p:sp>
+      <p:sp>
+        <p:nvSpPr>
+          <p:cNvPr id="3" name="Notes Placeholder 2"/>
+          <p:cNvSpPr>
+            <a:spLocks noGrp="1"/>
+          </p:cNvSpPr>
+          <p:nvPr>
+            <p:ph type="body" idx="1"/>
+          </p:nvPr>
+        </p:nvSpPr>
+        <p:spPr/>
+        <p:txBody>
+          <a:bodyPr/>
+          <a:lstStyle/>
+          <a:p>
+            <a:endParaRPr lang="pl-PL" dirty="0"/>
+          </a:p>
+        </p:txBody>
+      </p:sp>
+      <p:sp>
+        <p:nvSpPr>
+          <p:cNvPr id="4" name="Slide Number Placeholder 3"/>
+          <p:cNvSpPr>
+            <a:spLocks noGrp="1"/>
+          </p:cNvSpPr>
+          <p:nvPr>
+            <p:ph type="sldNum" sz="quarter" idx="5"/>
+          </p:nvPr>
+        </p:nvSpPr>
+        <p:spPr/>
+        <p:txBody>
+          <a:bodyPr/>
+          <a:lstStyle/>
+          <a:p>
+            <a:fld id="{028B4CE3-0D44-4C07-90A8-72C114EE772D}" type="slidenum">
+              <a:rPr lang="pl-PL" smtClean="0"/>
+              <a:t>7</a:t>
+            </a:fld>
+            <a:endParaRPr lang="pl-PL"/>
+          </a:p>
+        </p:txBody>
+      </p:sp>
+    </p:spTree>
+    <p:extLst>
+      <p:ext uri="{BB962C8B-B14F-4D97-AF65-F5344CB8AC3E}">
+        <p14:creationId xmlns:p14="http://schemas.microsoft.com/office/powerpoint/2010/main" val="1010159116"/>
+      </p:ext>
+    </p:extLst>
+  </p:cSld>
+  <p:clrMapOvr>
+    <a:masterClrMapping/>
+  </p:clrMapOvr>
+</p:notes>
 </file>
 
 <file path=ppt/slideLayouts/slideLayout1.xml><?xml version="1.0" encoding="utf-8"?>
@@ -3334,6 +3776,14 @@
 <file path=ppt/slides/slide1.xml><?xml version="1.0" encoding="utf-8"?>
 <p:sld xmlns:a="http://schemas.openxmlformats.org/drawingml/2006/main" xmlns:r="http://schemas.openxmlformats.org/officeDocument/2006/relationships" xmlns:p="http://schemas.openxmlformats.org/presentationml/2006/main">
   <p:cSld>
+    <p:bg>
+      <p:bgPr>
+        <a:solidFill>
+          <a:schemeClr val="bg1"/>
+        </a:solidFill>
+        <a:effectLst/>
+      </p:bgPr>
+    </p:bg>
     <p:spTree>
       <p:nvGrpSpPr>
         <p:cNvPr id="1" name=""/>
@@ -3348,38 +3798,497 @@
           <a:chExt cx="0" cy="0"/>
         </a:xfrm>
       </p:grpSpPr>
-      <p:sp>
-        <p:nvSpPr>
-          <p:cNvPr id="2" name="Title 1">
-            <a:extLst>
-              <a:ext uri="{FF2B5EF4-FFF2-40B4-BE49-F238E27FC236}">
-                <a16:creationId xmlns:a16="http://schemas.microsoft.com/office/drawing/2014/main" id="{4A8E7AF6-291C-040E-AC74-C5ED80589CFC}"/>
-              </a:ext>
-            </a:extLst>
-          </p:cNvPr>
-          <p:cNvSpPr>
-            <a:spLocks noGrp="1"/>
-          </p:cNvSpPr>
-          <p:nvPr>
-            <p:ph type="ctrTitle"/>
+      <p:sp useBgFill="1">
+        <p:nvSpPr>
+          <p:cNvPr id="8" name="Rectangle 7">
+            <a:extLst>
+              <a:ext uri="{FF2B5EF4-FFF2-40B4-BE49-F238E27FC236}">
+                <a16:creationId xmlns:a16="http://schemas.microsoft.com/office/drawing/2014/main" id="{0E30439A-8A5B-46EC-8283-9B6B031D40D0}"/>
+              </a:ext>
+              <a:ext uri="{C183D7F6-B498-43B3-948B-1728B52AA6E4}">
+                <adec:decorative xmlns:adec="http://schemas.microsoft.com/office/drawing/2017/decorative" val="1"/>
+              </a:ext>
+            </a:extLst>
+          </p:cNvPr>
+          <p:cNvSpPr>
+            <a:spLocks noGrp="1" noRot="1" noChangeAspect="1" noMove="1" noResize="1" noEditPoints="1" noAdjustHandles="1" noChangeArrowheads="1" noChangeShapeType="1" noTextEdit="1"/>
+          </p:cNvSpPr>
+          <p:nvPr>
+            <p:extLst>
+              <p:ext uri="{386F3935-93C4-4BCD-93E2-E3B085C9AB24}">
+                <p16:designElem xmlns:p16="http://schemas.microsoft.com/office/powerpoint/2015/main" val="1"/>
+              </p:ext>
+            </p:extLst>
           </p:nvPr>
         </p:nvSpPr>
         <p:spPr>
           <a:xfrm>
-            <a:off x="1524000" y="778598"/>
-            <a:ext cx="9144000" cy="4198027"/>
+            <a:off x="0" y="0"/>
+            <a:ext cx="12192000" cy="6858000"/>
+          </a:xfrm>
+          <a:prstGeom prst="rect">
+            <a:avLst/>
+          </a:prstGeom>
+          <a:ln w="12700" cap="flat" cmpd="sng" algn="ctr">
+            <a:noFill/>
+            <a:prstDash val="solid"/>
+            <a:miter lim="800000"/>
+          </a:ln>
+          <a:effectLst/>
+          <a:extLst>
+            <a:ext uri="{91240B29-F687-4F45-9708-019B960494DF}">
+              <a14:hiddenLine xmlns:a14="http://schemas.microsoft.com/office/drawing/2010/main" w="12700" cap="flat" cmpd="sng" algn="ctr">
+                <a:solidFill>
+                  <a:schemeClr val="accent1">
+                    <a:shade val="50000"/>
+                  </a:schemeClr>
+                </a:solidFill>
+                <a:prstDash val="solid"/>
+                <a:miter lim="800000"/>
+              </a14:hiddenLine>
+            </a:ext>
+          </a:extLst>
+        </p:spPr>
+        <p:style>
+          <a:lnRef idx="2">
+            <a:schemeClr val="accent1">
+              <a:shade val="50000"/>
+            </a:schemeClr>
+          </a:lnRef>
+          <a:fillRef idx="1">
+            <a:schemeClr val="accent1"/>
+          </a:fillRef>
+          <a:effectRef idx="0">
+            <a:schemeClr val="accent1"/>
+          </a:effectRef>
+          <a:fontRef idx="minor">
+            <a:schemeClr val="lt1"/>
+          </a:fontRef>
+        </p:style>
+        <p:txBody>
+          <a:bodyPr rtlCol="0" anchor="ctr"/>
+          <a:lstStyle/>
+          <a:p>
+            <a:pPr algn="ctr"/>
+            <a:endParaRPr lang="en-US"/>
+          </a:p>
+        </p:txBody>
+      </p:sp>
+      <p:sp>
+        <p:nvSpPr>
+          <p:cNvPr id="10" name="Rectangle 9">
+            <a:extLst>
+              <a:ext uri="{FF2B5EF4-FFF2-40B4-BE49-F238E27FC236}">
+                <a16:creationId xmlns:a16="http://schemas.microsoft.com/office/drawing/2014/main" id="{5CEAD642-85CF-4750-8432-7C80C901F001}"/>
+              </a:ext>
+              <a:ext uri="{C183D7F6-B498-43B3-948B-1728B52AA6E4}">
+                <adec:decorative xmlns:adec="http://schemas.microsoft.com/office/drawing/2017/decorative" val="1"/>
+              </a:ext>
+            </a:extLst>
+          </p:cNvPr>
+          <p:cNvSpPr>
+            <a:spLocks noGrp="1" noRot="1" noChangeAspect="1" noMove="1" noResize="1" noEditPoints="1" noAdjustHandles="1" noChangeArrowheads="1" noChangeShapeType="1" noTextEdit="1"/>
+          </p:cNvSpPr>
+          <p:nvPr>
+            <p:extLst>
+              <p:ext uri="{386F3935-93C4-4BCD-93E2-E3B085C9AB24}">
+                <p16:designElem xmlns:p16="http://schemas.microsoft.com/office/powerpoint/2015/main" val="1"/>
+              </p:ext>
+            </p:extLst>
+          </p:nvPr>
+        </p:nvSpPr>
+        <p:spPr>
+          <a:xfrm>
+            <a:off x="0" y="-427"/>
+            <a:ext cx="12192001" cy="6858000"/>
+          </a:xfrm>
+          <a:prstGeom prst="rect">
+            <a:avLst/>
+          </a:prstGeom>
+          <a:gradFill>
+            <a:gsLst>
+              <a:gs pos="0">
+                <a:srgbClr val="000000"/>
+              </a:gs>
+              <a:gs pos="100000">
+                <a:schemeClr val="accent1">
+                  <a:lumMod val="75000"/>
+                </a:schemeClr>
+              </a:gs>
+            </a:gsLst>
+            <a:lin ang="15000000" scaled="0"/>
+          </a:gradFill>
+          <a:ln>
+            <a:noFill/>
+          </a:ln>
+        </p:spPr>
+        <p:style>
+          <a:lnRef idx="2">
+            <a:schemeClr val="accent1">
+              <a:shade val="50000"/>
+            </a:schemeClr>
+          </a:lnRef>
+          <a:fillRef idx="1">
+            <a:schemeClr val="accent1"/>
+          </a:fillRef>
+          <a:effectRef idx="0">
+            <a:schemeClr val="accent1"/>
+          </a:effectRef>
+          <a:fontRef idx="minor">
+            <a:schemeClr val="lt1"/>
+          </a:fontRef>
+        </p:style>
+        <p:txBody>
+          <a:bodyPr rtlCol="0" anchor="ctr"/>
+          <a:lstStyle/>
+          <a:p>
+            <a:pPr algn="ctr"/>
+            <a:endParaRPr lang="en-US"/>
+          </a:p>
+        </p:txBody>
+      </p:sp>
+      <p:sp>
+        <p:nvSpPr>
+          <p:cNvPr id="12" name="Rectangle 11">
+            <a:extLst>
+              <a:ext uri="{FF2B5EF4-FFF2-40B4-BE49-F238E27FC236}">
+                <a16:creationId xmlns:a16="http://schemas.microsoft.com/office/drawing/2014/main" id="{FA33EEAE-15D5-4119-8C1E-89D943F911EF}"/>
+              </a:ext>
+              <a:ext uri="{C183D7F6-B498-43B3-948B-1728B52AA6E4}">
+                <adec:decorative xmlns:adec="http://schemas.microsoft.com/office/drawing/2017/decorative" val="1"/>
+              </a:ext>
+            </a:extLst>
+          </p:cNvPr>
+          <p:cNvSpPr>
+            <a:spLocks noGrp="1" noRot="1" noChangeAspect="1" noMove="1" noResize="1" noEditPoints="1" noAdjustHandles="1" noChangeArrowheads="1" noChangeShapeType="1" noTextEdit="1"/>
+          </p:cNvSpPr>
+          <p:nvPr>
+            <p:extLst>
+              <p:ext uri="{386F3935-93C4-4BCD-93E2-E3B085C9AB24}">
+                <p16:designElem xmlns:p16="http://schemas.microsoft.com/office/powerpoint/2015/main" val="1"/>
+              </p:ext>
+            </p:extLst>
+          </p:nvPr>
+        </p:nvSpPr>
+        <p:spPr>
+          <a:xfrm rot="10800000" flipH="1">
+            <a:off x="455521" y="-1720"/>
+            <a:ext cx="11750040" cy="6840685"/>
+          </a:xfrm>
+          <a:prstGeom prst="rect">
+            <a:avLst/>
+          </a:prstGeom>
+          <a:gradFill>
+            <a:gsLst>
+              <a:gs pos="21000">
+                <a:schemeClr val="accent1">
+                  <a:lumMod val="50000"/>
+                  <a:alpha val="61000"/>
+                </a:schemeClr>
+              </a:gs>
+              <a:gs pos="100000">
+                <a:schemeClr val="accent1">
+                  <a:alpha val="0"/>
+                </a:schemeClr>
+              </a:gs>
+            </a:gsLst>
+            <a:lin ang="21594000" scaled="0"/>
+          </a:gradFill>
+          <a:ln>
+            <a:noFill/>
+          </a:ln>
+        </p:spPr>
+        <p:style>
+          <a:lnRef idx="2">
+            <a:schemeClr val="accent1">
+              <a:shade val="50000"/>
+            </a:schemeClr>
+          </a:lnRef>
+          <a:fillRef idx="1">
+            <a:schemeClr val="accent1"/>
+          </a:fillRef>
+          <a:effectRef idx="0">
+            <a:schemeClr val="accent1"/>
+          </a:effectRef>
+          <a:fontRef idx="minor">
+            <a:schemeClr val="lt1"/>
+          </a:fontRef>
+        </p:style>
+        <p:txBody>
+          <a:bodyPr rtlCol="0" anchor="ctr"/>
+          <a:lstStyle/>
+          <a:p>
+            <a:pPr algn="ctr"/>
+            <a:endParaRPr lang="en-US"/>
+          </a:p>
+        </p:txBody>
+      </p:sp>
+      <p:sp>
+        <p:nvSpPr>
+          <p:cNvPr id="14" name="Rectangle 13">
+            <a:extLst>
+              <a:ext uri="{FF2B5EF4-FFF2-40B4-BE49-F238E27FC236}">
+                <a16:creationId xmlns:a16="http://schemas.microsoft.com/office/drawing/2014/main" id="{730D8B3B-9B80-4025-B934-26DC7D7CD231}"/>
+              </a:ext>
+              <a:ext uri="{C183D7F6-B498-43B3-948B-1728B52AA6E4}">
+                <adec:decorative xmlns:adec="http://schemas.microsoft.com/office/drawing/2017/decorative" val="1"/>
+              </a:ext>
+            </a:extLst>
+          </p:cNvPr>
+          <p:cNvSpPr>
+            <a:spLocks noGrp="1" noRot="1" noChangeAspect="1" noMove="1" noResize="1" noEditPoints="1" noAdjustHandles="1" noChangeArrowheads="1" noChangeShapeType="1" noTextEdit="1"/>
+          </p:cNvSpPr>
+          <p:nvPr>
+            <p:extLst>
+              <p:ext uri="{386F3935-93C4-4BCD-93E2-E3B085C9AB24}">
+                <p16:designElem xmlns:p16="http://schemas.microsoft.com/office/powerpoint/2015/main" val="1"/>
+              </p:ext>
+            </p:extLst>
+          </p:nvPr>
+        </p:nvSpPr>
+        <p:spPr>
+          <a:xfrm>
+            <a:off x="8606054" y="-1291"/>
+            <a:ext cx="3608179" cy="6858864"/>
+          </a:xfrm>
+          <a:prstGeom prst="rect">
+            <a:avLst/>
+          </a:prstGeom>
+          <a:gradFill>
+            <a:gsLst>
+              <a:gs pos="0">
+                <a:schemeClr val="accent1">
+                  <a:lumMod val="75000"/>
+                  <a:alpha val="0"/>
+                </a:schemeClr>
+              </a:gs>
+              <a:gs pos="99000">
+                <a:srgbClr val="000000">
+                  <a:alpha val="41000"/>
+                </a:srgbClr>
+              </a:gs>
+            </a:gsLst>
+            <a:lin ang="16200000" scaled="0"/>
+          </a:gradFill>
+          <a:ln>
+            <a:noFill/>
+          </a:ln>
+        </p:spPr>
+        <p:style>
+          <a:lnRef idx="2">
+            <a:schemeClr val="accent1">
+              <a:shade val="50000"/>
+            </a:schemeClr>
+          </a:lnRef>
+          <a:fillRef idx="1">
+            <a:schemeClr val="accent1"/>
+          </a:fillRef>
+          <a:effectRef idx="0">
+            <a:schemeClr val="accent1"/>
+          </a:effectRef>
+          <a:fontRef idx="minor">
+            <a:schemeClr val="lt1"/>
+          </a:fontRef>
+        </p:style>
+        <p:txBody>
+          <a:bodyPr rtlCol="0" anchor="ctr"/>
+          <a:lstStyle/>
+          <a:p>
+            <a:pPr algn="ctr"/>
+            <a:endParaRPr lang="en-US"/>
+          </a:p>
+        </p:txBody>
+      </p:sp>
+      <p:sp>
+        <p:nvSpPr>
+          <p:cNvPr id="16" name="Oval 15">
+            <a:extLst>
+              <a:ext uri="{FF2B5EF4-FFF2-40B4-BE49-F238E27FC236}">
+                <a16:creationId xmlns:a16="http://schemas.microsoft.com/office/drawing/2014/main" id="{B5A1B09C-1565-46F8-B70F-621C5EB48A09}"/>
+              </a:ext>
+              <a:ext uri="{C183D7F6-B498-43B3-948B-1728B52AA6E4}">
+                <adec:decorative xmlns:adec="http://schemas.microsoft.com/office/drawing/2017/decorative" val="1"/>
+              </a:ext>
+            </a:extLst>
+          </p:cNvPr>
+          <p:cNvSpPr>
+            <a:spLocks noGrp="1" noRot="1" noChangeAspect="1" noMove="1" noResize="1" noEditPoints="1" noAdjustHandles="1" noChangeArrowheads="1" noChangeShapeType="1" noTextEdit="1"/>
+          </p:cNvSpPr>
+          <p:nvPr>
+            <p:extLst>
+              <p:ext uri="{386F3935-93C4-4BCD-93E2-E3B085C9AB24}">
+                <p16:designElem xmlns:p16="http://schemas.microsoft.com/office/powerpoint/2015/main" val="1"/>
+              </p:ext>
+            </p:extLst>
+          </p:nvPr>
+        </p:nvSpPr>
+        <p:spPr>
+          <a:xfrm rot="15274173">
+            <a:off x="6059728" y="779270"/>
+            <a:ext cx="4967533" cy="4988390"/>
+          </a:xfrm>
+          <a:prstGeom prst="ellipse">
+            <a:avLst/>
+          </a:prstGeom>
+          <a:gradFill>
+            <a:gsLst>
+              <a:gs pos="0">
+                <a:schemeClr val="accent1">
+                  <a:alpha val="24000"/>
+                </a:schemeClr>
+              </a:gs>
+              <a:gs pos="79000">
+                <a:schemeClr val="accent1">
+                  <a:lumMod val="60000"/>
+                  <a:lumOff val="40000"/>
+                  <a:alpha val="0"/>
+                </a:schemeClr>
+              </a:gs>
+            </a:gsLst>
+            <a:lin ang="14400000" scaled="0"/>
+          </a:gradFill>
+          <a:ln>
+            <a:noFill/>
+          </a:ln>
+        </p:spPr>
+        <p:style>
+          <a:lnRef idx="2">
+            <a:schemeClr val="accent1">
+              <a:shade val="50000"/>
+            </a:schemeClr>
+          </a:lnRef>
+          <a:fillRef idx="1">
+            <a:schemeClr val="accent1"/>
+          </a:fillRef>
+          <a:effectRef idx="0">
+            <a:schemeClr val="accent1"/>
+          </a:effectRef>
+          <a:fontRef idx="minor">
+            <a:schemeClr val="lt1"/>
+          </a:fontRef>
+        </p:style>
+        <p:txBody>
+          <a:bodyPr rtlCol="0" anchor="ctr"/>
+          <a:lstStyle/>
+          <a:p>
+            <a:pPr algn="ctr"/>
+            <a:endParaRPr lang="en-US" dirty="0"/>
+          </a:p>
+        </p:txBody>
+      </p:sp>
+      <p:sp>
+        <p:nvSpPr>
+          <p:cNvPr id="2" name="Title 1">
+            <a:extLst>
+              <a:ext uri="{FF2B5EF4-FFF2-40B4-BE49-F238E27FC236}">
+                <a16:creationId xmlns:a16="http://schemas.microsoft.com/office/drawing/2014/main" id="{4A8E7AF6-291C-040E-AC74-C5ED80589CFC}"/>
+              </a:ext>
+            </a:extLst>
+          </p:cNvPr>
+          <p:cNvSpPr>
+            <a:spLocks noGrp="1"/>
+          </p:cNvSpPr>
+          <p:nvPr>
+            <p:ph type="ctrTitle"/>
+          </p:nvPr>
+        </p:nvSpPr>
+        <p:spPr>
+          <a:xfrm>
+            <a:off x="1386865" y="818984"/>
+            <a:ext cx="6596245" cy="3268520"/>
           </a:xfrm>
         </p:spPr>
         <p:txBody>
           <a:bodyPr>
-            <a:normAutofit fontScale="90000"/>
+            <a:normAutofit/>
           </a:bodyPr>
           <a:lstStyle/>
           <a:p>
-            <a:r>
-              <a:rPr lang="pl-PL" dirty="0"/>
+            <a:pPr algn="r"/>
+            <a:r>
+              <a:rPr lang="pl-PL" sz="4100">
+                <a:solidFill>
+                  <a:srgbClr val="FFFFFF"/>
+                </a:solidFill>
+              </a:rPr>
               <a:t>Projekt hurtowni danych: analiza wyników i czynników wpływających na osiągnięcia kierowców Formuły 1 w latach 1950-2023</a:t>
             </a:r>
+          </a:p>
+        </p:txBody>
+      </p:sp>
+      <p:sp>
+        <p:nvSpPr>
+          <p:cNvPr id="18" name="Rectangle 17">
+            <a:extLst>
+              <a:ext uri="{FF2B5EF4-FFF2-40B4-BE49-F238E27FC236}">
+                <a16:creationId xmlns:a16="http://schemas.microsoft.com/office/drawing/2014/main" id="{8C516CC8-80AC-446C-A56E-9F54B7210402}"/>
+              </a:ext>
+              <a:ext uri="{C183D7F6-B498-43B3-948B-1728B52AA6E4}">
+                <adec:decorative xmlns:adec="http://schemas.microsoft.com/office/drawing/2017/decorative" val="1"/>
+              </a:ext>
+            </a:extLst>
+          </p:cNvPr>
+          <p:cNvSpPr>
+            <a:spLocks noGrp="1" noRot="1" noChangeAspect="1" noMove="1" noResize="1" noEditPoints="1" noAdjustHandles="1" noChangeArrowheads="1" noChangeShapeType="1" noTextEdit="1"/>
+          </p:cNvSpPr>
+          <p:nvPr>
+            <p:extLst>
+              <p:ext uri="{386F3935-93C4-4BCD-93E2-E3B085C9AB24}">
+                <p16:designElem xmlns:p16="http://schemas.microsoft.com/office/powerpoint/2015/main" val="1"/>
+              </p:ext>
+            </p:extLst>
+          </p:nvPr>
+        </p:nvSpPr>
+        <p:spPr>
+          <a:xfrm rot="10800000" flipH="1">
+            <a:off x="6314" y="4480038"/>
+            <a:ext cx="12179371" cy="2377962"/>
+          </a:xfrm>
+          <a:prstGeom prst="rect">
+            <a:avLst/>
+          </a:prstGeom>
+          <a:gradFill>
+            <a:gsLst>
+              <a:gs pos="0">
+                <a:schemeClr val="accent1">
+                  <a:lumMod val="75000"/>
+                  <a:alpha val="50000"/>
+                </a:schemeClr>
+              </a:gs>
+              <a:gs pos="99000">
+                <a:srgbClr val="000000">
+                  <a:alpha val="34000"/>
+                </a:srgbClr>
+              </a:gs>
+            </a:gsLst>
+            <a:lin ang="17400000" scaled="0"/>
+          </a:gradFill>
+          <a:ln>
+            <a:noFill/>
+          </a:ln>
+        </p:spPr>
+        <p:style>
+          <a:lnRef idx="2">
+            <a:schemeClr val="accent1">
+              <a:shade val="50000"/>
+            </a:schemeClr>
+          </a:lnRef>
+          <a:fillRef idx="1">
+            <a:schemeClr val="accent1"/>
+          </a:fillRef>
+          <a:effectRef idx="0">
+            <a:schemeClr val="accent1"/>
+          </a:effectRef>
+          <a:fontRef idx="minor">
+            <a:schemeClr val="lt1"/>
+          </a:fontRef>
+        </p:style>
+        <p:txBody>
+          <a:bodyPr rtlCol="0" anchor="ctr"/>
+          <a:lstStyle/>
+          <a:p>
+            <a:pPr algn="ctr"/>
+            <a:endParaRPr lang="en-US"/>
           </a:p>
         </p:txBody>
       </p:sp>
@@ -3401,21 +4310,103 @@
         </p:nvSpPr>
         <p:spPr>
           <a:xfrm>
-            <a:off x="1524000" y="5202238"/>
-            <a:ext cx="9144000" cy="1655762"/>
+            <a:off x="1931874" y="4797188"/>
+            <a:ext cx="6051236" cy="1241828"/>
           </a:xfrm>
         </p:spPr>
         <p:txBody>
-          <a:bodyPr/>
-          <a:lstStyle/>
-          <a:p>
-            <a:pPr lvl="0">
+          <a:bodyPr>
+            <a:normAutofit/>
+          </a:bodyPr>
+          <a:lstStyle/>
+          <a:p>
+            <a:pPr lvl="0" algn="r">
               <a:buSzPts val="1400"/>
             </a:pPr>
             <a:r>
-              <a:rPr lang="pl-PL" dirty="0"/>
+              <a:rPr lang="pl-PL">
+                <a:solidFill>
+                  <a:srgbClr val="FFFFFF"/>
+                </a:solidFill>
+              </a:rPr>
               <a:t>Mikołaj Kubś 272662</a:t>
             </a:r>
+          </a:p>
+        </p:txBody>
+      </p:sp>
+      <p:sp>
+        <p:nvSpPr>
+          <p:cNvPr id="20" name="Rectangle 19">
+            <a:extLst>
+              <a:ext uri="{FF2B5EF4-FFF2-40B4-BE49-F238E27FC236}">
+                <a16:creationId xmlns:a16="http://schemas.microsoft.com/office/drawing/2014/main" id="{53947E58-F088-49F1-A3D1-DEA690192E84}"/>
+              </a:ext>
+              <a:ext uri="{C183D7F6-B498-43B3-948B-1728B52AA6E4}">
+                <adec:decorative xmlns:adec="http://schemas.microsoft.com/office/drawing/2017/decorative" val="1"/>
+              </a:ext>
+            </a:extLst>
+          </p:cNvPr>
+          <p:cNvSpPr>
+            <a:spLocks noGrp="1" noRot="1" noChangeAspect="1" noMove="1" noResize="1" noEditPoints="1" noAdjustHandles="1" noChangeArrowheads="1" noChangeShapeType="1" noTextEdit="1"/>
+          </p:cNvSpPr>
+          <p:nvPr>
+            <p:extLst>
+              <p:ext uri="{386F3935-93C4-4BCD-93E2-E3B085C9AB24}">
+                <p16:designElem xmlns:p16="http://schemas.microsoft.com/office/powerpoint/2015/main" val="1"/>
+              </p:ext>
+            </p:extLst>
+          </p:nvPr>
+        </p:nvSpPr>
+        <p:spPr>
+          <a:xfrm rot="16200000" flipH="1">
+            <a:off x="6967085" y="1632660"/>
+            <a:ext cx="6857572" cy="3592258"/>
+          </a:xfrm>
+          <a:prstGeom prst="rect">
+            <a:avLst/>
+          </a:prstGeom>
+          <a:gradFill>
+            <a:gsLst>
+              <a:gs pos="0">
+                <a:schemeClr val="accent1">
+                  <a:lumMod val="75000"/>
+                  <a:alpha val="50000"/>
+                </a:schemeClr>
+              </a:gs>
+              <a:gs pos="99000">
+                <a:srgbClr val="000000">
+                  <a:alpha val="0"/>
+                </a:srgbClr>
+              </a:gs>
+            </a:gsLst>
+            <a:lin ang="15600000" scaled="0"/>
+          </a:gradFill>
+          <a:ln>
+            <a:noFill/>
+          </a:ln>
+        </p:spPr>
+        <p:style>
+          <a:lnRef idx="2">
+            <a:schemeClr val="accent1">
+              <a:shade val="50000"/>
+            </a:schemeClr>
+          </a:lnRef>
+          <a:fillRef idx="1">
+            <a:schemeClr val="accent1"/>
+          </a:fillRef>
+          <a:effectRef idx="0">
+            <a:schemeClr val="accent1"/>
+          </a:effectRef>
+          <a:fontRef idx="minor">
+            <a:schemeClr val="lt1"/>
+          </a:fontRef>
+        </p:style>
+        <p:txBody>
+          <a:bodyPr rtlCol="0" anchor="ctr"/>
+          <a:lstStyle/>
+          <a:p>
+            <a:pPr algn="ctr"/>
+            <a:endParaRPr lang="en-US"/>
           </a:p>
         </p:txBody>
       </p:sp>
@@ -3435,6 +4426,14 @@
 <file path=ppt/slides/slide2.xml><?xml version="1.0" encoding="utf-8"?>
 <p:sld xmlns:a="http://schemas.openxmlformats.org/drawingml/2006/main" xmlns:r="http://schemas.openxmlformats.org/officeDocument/2006/relationships" xmlns:p="http://schemas.openxmlformats.org/presentationml/2006/main">
   <p:cSld>
+    <p:bg>
+      <p:bgPr>
+        <a:solidFill>
+          <a:schemeClr val="bg1"/>
+        </a:solidFill>
+        <a:effectLst/>
+      </p:bgPr>
+    </p:bg>
     <p:spTree>
       <p:nvGrpSpPr>
         <p:cNvPr id="1" name=""/>
@@ -3449,6 +4448,382 @@
           <a:chExt cx="0" cy="0"/>
         </a:xfrm>
       </p:grpSpPr>
+      <p:sp useBgFill="1">
+        <p:nvSpPr>
+          <p:cNvPr id="8" name="Rectangle 7">
+            <a:extLst>
+              <a:ext uri="{FF2B5EF4-FFF2-40B4-BE49-F238E27FC236}">
+                <a16:creationId xmlns:a16="http://schemas.microsoft.com/office/drawing/2014/main" id="{1B15ED52-F352-441B-82BF-E0EA34836D08}"/>
+              </a:ext>
+              <a:ext uri="{C183D7F6-B498-43B3-948B-1728B52AA6E4}">
+                <adec:decorative xmlns:adec="http://schemas.microsoft.com/office/drawing/2017/decorative" val="1"/>
+              </a:ext>
+            </a:extLst>
+          </p:cNvPr>
+          <p:cNvSpPr>
+            <a:spLocks noGrp="1" noRot="1" noChangeAspect="1" noMove="1" noResize="1" noEditPoints="1" noAdjustHandles="1" noChangeArrowheads="1" noChangeShapeType="1" noTextEdit="1"/>
+          </p:cNvSpPr>
+          <p:nvPr>
+            <p:extLst>
+              <p:ext uri="{386F3935-93C4-4BCD-93E2-E3B085C9AB24}">
+                <p16:designElem xmlns:p16="http://schemas.microsoft.com/office/powerpoint/2015/main" val="1"/>
+              </p:ext>
+            </p:extLst>
+          </p:nvPr>
+        </p:nvSpPr>
+        <p:spPr>
+          <a:xfrm>
+            <a:off x="0" y="0"/>
+            <a:ext cx="12192000" cy="6858000"/>
+          </a:xfrm>
+          <a:prstGeom prst="rect">
+            <a:avLst/>
+          </a:prstGeom>
+          <a:ln w="12700" cap="flat" cmpd="sng" algn="ctr">
+            <a:noFill/>
+            <a:prstDash val="solid"/>
+            <a:miter lim="800000"/>
+          </a:ln>
+          <a:effectLst/>
+          <a:extLst>
+            <a:ext uri="{91240B29-F687-4F45-9708-019B960494DF}">
+              <a14:hiddenLine xmlns:a14="http://schemas.microsoft.com/office/drawing/2010/main" w="12700" cap="flat" cmpd="sng" algn="ctr">
+                <a:solidFill>
+                  <a:schemeClr val="accent1">
+                    <a:shade val="50000"/>
+                  </a:schemeClr>
+                </a:solidFill>
+                <a:prstDash val="solid"/>
+                <a:miter lim="800000"/>
+              </a14:hiddenLine>
+            </a:ext>
+          </a:extLst>
+        </p:spPr>
+        <p:style>
+          <a:lnRef idx="2">
+            <a:schemeClr val="accent1">
+              <a:shade val="50000"/>
+            </a:schemeClr>
+          </a:lnRef>
+          <a:fillRef idx="1">
+            <a:schemeClr val="accent1"/>
+          </a:fillRef>
+          <a:effectRef idx="0">
+            <a:schemeClr val="accent1"/>
+          </a:effectRef>
+          <a:fontRef idx="minor">
+            <a:schemeClr val="lt1"/>
+          </a:fontRef>
+        </p:style>
+        <p:txBody>
+          <a:bodyPr rtlCol="0" anchor="ctr"/>
+          <a:lstStyle/>
+          <a:p>
+            <a:pPr algn="ctr"/>
+            <a:endParaRPr lang="en-US"/>
+          </a:p>
+        </p:txBody>
+      </p:sp>
+      <p:sp>
+        <p:nvSpPr>
+          <p:cNvPr id="10" name="Rectangle 9">
+            <a:extLst>
+              <a:ext uri="{FF2B5EF4-FFF2-40B4-BE49-F238E27FC236}">
+                <a16:creationId xmlns:a16="http://schemas.microsoft.com/office/drawing/2014/main" id="{3B2E3793-BFE6-45A2-9B7B-E18844431C99}"/>
+              </a:ext>
+              <a:ext uri="{C183D7F6-B498-43B3-948B-1728B52AA6E4}">
+                <adec:decorative xmlns:adec="http://schemas.microsoft.com/office/drawing/2017/decorative" val="1"/>
+              </a:ext>
+            </a:extLst>
+          </p:cNvPr>
+          <p:cNvSpPr>
+            <a:spLocks noGrp="1" noRot="1" noChangeAspect="1" noMove="1" noResize="1" noEditPoints="1" noAdjustHandles="1" noChangeArrowheads="1" noChangeShapeType="1" noTextEdit="1"/>
+          </p:cNvSpPr>
+          <p:nvPr>
+            <p:extLst>
+              <p:ext uri="{386F3935-93C4-4BCD-93E2-E3B085C9AB24}">
+                <p16:designElem xmlns:p16="http://schemas.microsoft.com/office/powerpoint/2015/main" val="1"/>
+              </p:ext>
+            </p:extLst>
+          </p:nvPr>
+        </p:nvSpPr>
+        <p:spPr>
+          <a:xfrm flipH="1">
+            <a:off x="-1" y="-1"/>
+            <a:ext cx="12191998" cy="1590742"/>
+          </a:xfrm>
+          <a:prstGeom prst="rect">
+            <a:avLst/>
+          </a:prstGeom>
+          <a:gradFill>
+            <a:gsLst>
+              <a:gs pos="0">
+                <a:srgbClr val="000000"/>
+              </a:gs>
+              <a:gs pos="100000">
+                <a:schemeClr val="accent1">
+                  <a:lumMod val="75000"/>
+                </a:schemeClr>
+              </a:gs>
+            </a:gsLst>
+            <a:lin ang="8400000" scaled="0"/>
+          </a:gradFill>
+          <a:ln>
+            <a:noFill/>
+          </a:ln>
+        </p:spPr>
+        <p:style>
+          <a:lnRef idx="2">
+            <a:schemeClr val="accent1">
+              <a:shade val="50000"/>
+            </a:schemeClr>
+          </a:lnRef>
+          <a:fillRef idx="1">
+            <a:schemeClr val="accent1"/>
+          </a:fillRef>
+          <a:effectRef idx="0">
+            <a:schemeClr val="accent1"/>
+          </a:effectRef>
+          <a:fontRef idx="minor">
+            <a:schemeClr val="lt1"/>
+          </a:fontRef>
+        </p:style>
+        <p:txBody>
+          <a:bodyPr rtlCol="0" anchor="ctr"/>
+          <a:lstStyle/>
+          <a:p>
+            <a:pPr algn="ctr"/>
+            <a:endParaRPr lang="en-US"/>
+          </a:p>
+        </p:txBody>
+      </p:sp>
+      <p:sp>
+        <p:nvSpPr>
+          <p:cNvPr id="12" name="Rectangle 11">
+            <a:extLst>
+              <a:ext uri="{FF2B5EF4-FFF2-40B4-BE49-F238E27FC236}">
+                <a16:creationId xmlns:a16="http://schemas.microsoft.com/office/drawing/2014/main" id="{BC4C4868-CB8F-4AF9-9CDB-8108F2C19B67}"/>
+              </a:ext>
+              <a:ext uri="{C183D7F6-B498-43B3-948B-1728B52AA6E4}">
+                <adec:decorative xmlns:adec="http://schemas.microsoft.com/office/drawing/2017/decorative" val="1"/>
+              </a:ext>
+            </a:extLst>
+          </p:cNvPr>
+          <p:cNvSpPr>
+            <a:spLocks noGrp="1" noRot="1" noChangeAspect="1" noMove="1" noResize="1" noEditPoints="1" noAdjustHandles="1" noChangeArrowheads="1" noChangeShapeType="1" noTextEdit="1"/>
+          </p:cNvSpPr>
+          <p:nvPr>
+            <p:extLst>
+              <p:ext uri="{386F3935-93C4-4BCD-93E2-E3B085C9AB24}">
+                <p16:designElem xmlns:p16="http://schemas.microsoft.com/office/powerpoint/2015/main" val="1"/>
+              </p:ext>
+            </p:extLst>
+          </p:nvPr>
+        </p:nvSpPr>
+        <p:spPr>
+          <a:xfrm rot="10800000" flipH="1">
+            <a:off x="-3" y="0"/>
+            <a:ext cx="8115306" cy="1590742"/>
+          </a:xfrm>
+          <a:prstGeom prst="rect">
+            <a:avLst/>
+          </a:prstGeom>
+          <a:gradFill>
+            <a:gsLst>
+              <a:gs pos="20000">
+                <a:schemeClr val="accent1">
+                  <a:alpha val="0"/>
+                </a:schemeClr>
+              </a:gs>
+              <a:gs pos="100000">
+                <a:schemeClr val="accent1">
+                  <a:lumMod val="50000"/>
+                  <a:alpha val="55000"/>
+                </a:schemeClr>
+              </a:gs>
+            </a:gsLst>
+            <a:lin ang="13800000" scaled="0"/>
+          </a:gradFill>
+          <a:ln>
+            <a:noFill/>
+          </a:ln>
+        </p:spPr>
+        <p:style>
+          <a:lnRef idx="2">
+            <a:schemeClr val="accent1">
+              <a:shade val="50000"/>
+            </a:schemeClr>
+          </a:lnRef>
+          <a:fillRef idx="1">
+            <a:schemeClr val="accent1"/>
+          </a:fillRef>
+          <a:effectRef idx="0">
+            <a:schemeClr val="accent1"/>
+          </a:effectRef>
+          <a:fontRef idx="minor">
+            <a:schemeClr val="lt1"/>
+          </a:fontRef>
+        </p:style>
+        <p:txBody>
+          <a:bodyPr rtlCol="0" anchor="ctr"/>
+          <a:lstStyle/>
+          <a:p>
+            <a:pPr algn="ctr"/>
+            <a:endParaRPr lang="en-US"/>
+          </a:p>
+        </p:txBody>
+      </p:sp>
+      <p:sp>
+        <p:nvSpPr>
+          <p:cNvPr id="14" name="Rectangle 13">
+            <a:extLst>
+              <a:ext uri="{FF2B5EF4-FFF2-40B4-BE49-F238E27FC236}">
+                <a16:creationId xmlns:a16="http://schemas.microsoft.com/office/drawing/2014/main" id="{375E0459-6403-40CD-989D-56A4407CA12E}"/>
+              </a:ext>
+              <a:ext uri="{C183D7F6-B498-43B3-948B-1728B52AA6E4}">
+                <adec:decorative xmlns:adec="http://schemas.microsoft.com/office/drawing/2017/decorative" val="1"/>
+              </a:ext>
+            </a:extLst>
+          </p:cNvPr>
+          <p:cNvSpPr>
+            <a:spLocks noGrp="1" noRot="1" noChangeAspect="1" noMove="1" noResize="1" noEditPoints="1" noAdjustHandles="1" noChangeArrowheads="1" noChangeShapeType="1" noTextEdit="1"/>
+          </p:cNvSpPr>
+          <p:nvPr>
+            <p:extLst>
+              <p:ext uri="{386F3935-93C4-4BCD-93E2-E3B085C9AB24}">
+                <p16:designElem xmlns:p16="http://schemas.microsoft.com/office/powerpoint/2015/main" val="1"/>
+              </p:ext>
+            </p:extLst>
+          </p:nvPr>
+        </p:nvSpPr>
+        <p:spPr>
+          <a:xfrm flipH="1">
+            <a:off x="8115299" y="-1"/>
+            <a:ext cx="4076698" cy="1590742"/>
+          </a:xfrm>
+          <a:prstGeom prst="rect">
+            <a:avLst/>
+          </a:prstGeom>
+          <a:gradFill>
+            <a:gsLst>
+              <a:gs pos="0">
+                <a:schemeClr val="accent1">
+                  <a:alpha val="66000"/>
+                </a:schemeClr>
+              </a:gs>
+              <a:gs pos="100000">
+                <a:srgbClr val="000000">
+                  <a:alpha val="30000"/>
+                </a:srgbClr>
+              </a:gs>
+            </a:gsLst>
+            <a:lin ang="13200000" scaled="0"/>
+          </a:gradFill>
+          <a:ln>
+            <a:noFill/>
+          </a:ln>
+        </p:spPr>
+        <p:style>
+          <a:lnRef idx="2">
+            <a:schemeClr val="accent1">
+              <a:shade val="50000"/>
+            </a:schemeClr>
+          </a:lnRef>
+          <a:fillRef idx="1">
+            <a:schemeClr val="accent1"/>
+          </a:fillRef>
+          <a:effectRef idx="0">
+            <a:schemeClr val="accent1"/>
+          </a:effectRef>
+          <a:fontRef idx="minor">
+            <a:schemeClr val="lt1"/>
+          </a:fontRef>
+        </p:style>
+        <p:txBody>
+          <a:bodyPr rtlCol="0" anchor="ctr"/>
+          <a:lstStyle/>
+          <a:p>
+            <a:pPr algn="ctr"/>
+            <a:endParaRPr lang="en-US"/>
+          </a:p>
+        </p:txBody>
+      </p:sp>
+      <p:sp>
+        <p:nvSpPr>
+          <p:cNvPr id="16" name="Rectangle 15">
+            <a:extLst>
+              <a:ext uri="{FF2B5EF4-FFF2-40B4-BE49-F238E27FC236}">
+                <a16:creationId xmlns:a16="http://schemas.microsoft.com/office/drawing/2014/main" id="{53E5B1A8-3AC9-4BD1-9BBC-78CA94F2D1BA}"/>
+              </a:ext>
+              <a:ext uri="{C183D7F6-B498-43B3-948B-1728B52AA6E4}">
+                <adec:decorative xmlns:adec="http://schemas.microsoft.com/office/drawing/2017/decorative" val="1"/>
+              </a:ext>
+            </a:extLst>
+          </p:cNvPr>
+          <p:cNvSpPr>
+            <a:spLocks noGrp="1" noRot="1" noChangeAspect="1" noMove="1" noResize="1" noEditPoints="1" noAdjustHandles="1" noChangeArrowheads="1" noChangeShapeType="1" noTextEdit="1"/>
+          </p:cNvSpPr>
+          <p:nvPr>
+            <p:extLst>
+              <p:ext uri="{386F3935-93C4-4BCD-93E2-E3B085C9AB24}">
+                <p16:designElem xmlns:p16="http://schemas.microsoft.com/office/powerpoint/2015/main" val="1"/>
+              </p:ext>
+            </p:extLst>
+          </p:nvPr>
+        </p:nvSpPr>
+        <p:spPr>
+          <a:xfrm>
+            <a:off x="459350" y="-1"/>
+            <a:ext cx="11732646" cy="1597433"/>
+          </a:xfrm>
+          <a:prstGeom prst="rect">
+            <a:avLst/>
+          </a:prstGeom>
+          <a:gradFill>
+            <a:gsLst>
+              <a:gs pos="50000">
+                <a:srgbClr val="000000">
+                  <a:alpha val="0"/>
+                </a:srgbClr>
+              </a:gs>
+              <a:gs pos="99000">
+                <a:schemeClr val="accent1">
+                  <a:lumMod val="50000"/>
+                  <a:alpha val="52000"/>
+                </a:schemeClr>
+              </a:gs>
+            </a:gsLst>
+            <a:lin ang="16800000" scaled="0"/>
+          </a:gradFill>
+          <a:ln>
+            <a:noFill/>
+          </a:ln>
+        </p:spPr>
+        <p:style>
+          <a:lnRef idx="2">
+            <a:schemeClr val="accent1">
+              <a:shade val="50000"/>
+            </a:schemeClr>
+          </a:lnRef>
+          <a:fillRef idx="1">
+            <a:schemeClr val="accent1"/>
+          </a:fillRef>
+          <a:effectRef idx="0">
+            <a:schemeClr val="accent1"/>
+          </a:effectRef>
+          <a:fontRef idx="minor">
+            <a:schemeClr val="lt1"/>
+          </a:fontRef>
+        </p:style>
+        <p:txBody>
+          <a:bodyPr rtlCol="0" anchor="ctr"/>
+          <a:lstStyle/>
+          <a:p>
+            <a:pPr algn="ctr"/>
+            <a:endParaRPr lang="en-US"/>
+          </a:p>
+        </p:txBody>
+      </p:sp>
       <p:sp>
         <p:nvSpPr>
           <p:cNvPr id="2" name="Title 1">
@@ -3465,13 +4840,24 @@
             <p:ph type="title"/>
           </p:nvPr>
         </p:nvSpPr>
-        <p:spPr/>
-        <p:txBody>
-          <a:bodyPr/>
-          <a:lstStyle/>
-          <a:p>
-            <a:r>
-              <a:rPr lang="pl-PL" dirty="0"/>
+        <p:spPr>
+          <a:xfrm>
+            <a:off x="1371599" y="294538"/>
+            <a:ext cx="9895951" cy="1033669"/>
+          </a:xfrm>
+        </p:spPr>
+        <p:txBody>
+          <a:bodyPr>
+            <a:normAutofit/>
+          </a:bodyPr>
+          <a:lstStyle/>
+          <a:p>
+            <a:r>
+              <a:rPr lang="pl-PL" sz="4000">
+                <a:solidFill>
+                  <a:srgbClr val="FFFFFF"/>
+                </a:solidFill>
+              </a:rPr>
               <a:t>Opis danych</a:t>
             </a:r>
           </a:p>
@@ -3493,75 +4879,82 @@
             <p:ph idx="1"/>
           </p:nvPr>
         </p:nvSpPr>
-        <p:spPr/>
-        <p:txBody>
-          <a:bodyPr/>
-          <a:lstStyle/>
-          <a:p>
-            <a:r>
-              <a:rPr lang="pl-PL" dirty="0"/>
+        <p:spPr>
+          <a:xfrm>
+            <a:off x="1371599" y="2318197"/>
+            <a:ext cx="9724031" cy="3683358"/>
+          </a:xfrm>
+        </p:spPr>
+        <p:txBody>
+          <a:bodyPr anchor="ctr">
+            <a:normAutofit/>
+          </a:bodyPr>
+          <a:lstStyle/>
+          <a:p>
+            <a:r>
+              <a:rPr lang="pl-PL" sz="2000"/>
               <a:t>Zbiór danych został pobrany ze </a:t>
             </a:r>
             <a:r>
-              <a:rPr lang="pl-PL" dirty="0">
+              <a:rPr lang="pl-PL" sz="2000">
                 <a:hlinkClick r:id="rId2"/>
               </a:rPr>
               <a:t>strony kaggle</a:t>
             </a:r>
             <a:r>
-              <a:rPr lang="pl-PL" dirty="0"/>
+              <a:rPr lang="pl-PL" sz="2000"/>
               <a:t> </a:t>
             </a:r>
             <a:r>
-              <a:rPr lang="en-US" dirty="0"/>
+              <a:rPr lang="en-US" sz="2000"/>
               <a:t>Formula 1 World Championship (1950 - 2024)</a:t>
             </a:r>
             <a:r>
-              <a:rPr lang="pl-PL" dirty="0"/>
+              <a:rPr lang="pl-PL" sz="2000"/>
               <a:t>. Sam zbiór danych powstał na podstawie danych ze strony </a:t>
             </a:r>
             <a:r>
-              <a:rPr lang="pl-PL" dirty="0">
+              <a:rPr lang="pl-PL" sz="2000">
                 <a:hlinkClick r:id="rId3"/>
               </a:rPr>
               <a:t>http://ergast.com/mrd/</a:t>
             </a:r>
             <a:r>
-              <a:rPr lang="pl-PL" dirty="0"/>
+              <a:rPr lang="pl-PL" sz="2000"/>
               <a:t>.</a:t>
             </a:r>
           </a:p>
           <a:p>
             <a:r>
-              <a:rPr lang="pl-PL" dirty="0"/>
+              <a:rPr lang="pl-PL" sz="2000"/>
               <a:t>Zbiór obejmuje wyścigi, ich rezultaty, kierowców, konstruktorów, czasy okrążeń, czasy pit stopów czy kwalifikacje.</a:t>
             </a:r>
           </a:p>
           <a:p>
             <a:r>
-              <a:rPr lang="pl-PL" dirty="0"/>
+              <a:rPr lang="pl-PL" sz="2000"/>
               <a:t>Dodatkowo został wykorzystany </a:t>
             </a:r>
             <a:r>
-              <a:rPr lang="pl-PL" dirty="0">
+              <a:rPr lang="pl-PL" sz="2000">
                 <a:hlinkClick r:id="rId4"/>
               </a:rPr>
               <a:t>zbiór danych dla pogody</a:t>
             </a:r>
             <a:r>
-              <a:rPr lang="pl-PL" dirty="0"/>
+              <a:rPr lang="pl-PL" sz="2000"/>
               <a:t> (F1 Weather Dataset 2018-2023), rozszerzający możliwe analizy.</a:t>
             </a:r>
           </a:p>
           <a:p>
             <a:r>
-              <a:rPr lang="pl-PL" dirty="0"/>
+              <a:rPr lang="pl-PL" sz="2000"/>
               <a:t>Format: 14 plików .csv (ostatecznie użytych 7 z nich)</a:t>
             </a:r>
-            <a:endParaRPr lang="en-US" dirty="0"/>
-          </a:p>
-          <a:p>
-            <a:endParaRPr lang="pl-PL" dirty="0"/>
+            <a:endParaRPr lang="en-US" sz="2000"/>
+          </a:p>
+          <a:p>
+            <a:endParaRPr lang="pl-PL" sz="2000"/>
           </a:p>
         </p:txBody>
       </p:sp>
@@ -3581,6 +4974,14 @@
 <file path=ppt/slides/slide3.xml><?xml version="1.0" encoding="utf-8"?>
 <p:sld xmlns:a="http://schemas.openxmlformats.org/drawingml/2006/main" xmlns:r="http://schemas.openxmlformats.org/officeDocument/2006/relationships" xmlns:p="http://schemas.openxmlformats.org/presentationml/2006/main">
   <p:cSld>
+    <p:bg>
+      <p:bgPr>
+        <a:solidFill>
+          <a:schemeClr val="bg1"/>
+        </a:solidFill>
+        <a:effectLst/>
+      </p:bgPr>
+    </p:bg>
     <p:spTree>
       <p:nvGrpSpPr>
         <p:cNvPr id="1" name=""/>
@@ -3595,6 +4996,479 @@
           <a:chExt cx="0" cy="0"/>
         </a:xfrm>
       </p:grpSpPr>
+      <p:sp useBgFill="1">
+        <p:nvSpPr>
+          <p:cNvPr id="16" name="Rectangle 15">
+            <a:extLst>
+              <a:ext uri="{FF2B5EF4-FFF2-40B4-BE49-F238E27FC236}">
+                <a16:creationId xmlns:a16="http://schemas.microsoft.com/office/drawing/2014/main" id="{A8384FB5-9ADC-4DDC-881B-597D56F5B15D}"/>
+              </a:ext>
+              <a:ext uri="{C183D7F6-B498-43B3-948B-1728B52AA6E4}">
+                <adec:decorative xmlns:adec="http://schemas.microsoft.com/office/drawing/2017/decorative" val="1"/>
+              </a:ext>
+            </a:extLst>
+          </p:cNvPr>
+          <p:cNvSpPr>
+            <a:spLocks noGrp="1" noRot="1" noChangeAspect="1" noMove="1" noResize="1" noEditPoints="1" noAdjustHandles="1" noChangeArrowheads="1" noChangeShapeType="1" noTextEdit="1"/>
+          </p:cNvSpPr>
+          <p:nvPr>
+            <p:extLst>
+              <p:ext uri="{386F3935-93C4-4BCD-93E2-E3B085C9AB24}">
+                <p16:designElem xmlns:p16="http://schemas.microsoft.com/office/powerpoint/2015/main" val="1"/>
+              </p:ext>
+            </p:extLst>
+          </p:nvPr>
+        </p:nvSpPr>
+        <p:spPr>
+          <a:xfrm>
+            <a:off x="0" y="0"/>
+            <a:ext cx="12192000" cy="6858000"/>
+          </a:xfrm>
+          <a:prstGeom prst="rect">
+            <a:avLst/>
+          </a:prstGeom>
+          <a:ln w="12700" cap="flat" cmpd="sng" algn="ctr">
+            <a:noFill/>
+            <a:prstDash val="solid"/>
+            <a:miter lim="800000"/>
+          </a:ln>
+          <a:effectLst/>
+          <a:extLst>
+            <a:ext uri="{91240B29-F687-4F45-9708-019B960494DF}">
+              <a14:hiddenLine xmlns:a14="http://schemas.microsoft.com/office/drawing/2010/main" w="12700" cap="flat" cmpd="sng" algn="ctr">
+                <a:solidFill>
+                  <a:schemeClr val="accent1">
+                    <a:shade val="50000"/>
+                  </a:schemeClr>
+                </a:solidFill>
+                <a:prstDash val="solid"/>
+                <a:miter lim="800000"/>
+              </a14:hiddenLine>
+            </a:ext>
+          </a:extLst>
+        </p:spPr>
+        <p:style>
+          <a:lnRef idx="2">
+            <a:schemeClr val="accent1">
+              <a:shade val="50000"/>
+            </a:schemeClr>
+          </a:lnRef>
+          <a:fillRef idx="1">
+            <a:schemeClr val="accent1"/>
+          </a:fillRef>
+          <a:effectRef idx="0">
+            <a:schemeClr val="accent1"/>
+          </a:effectRef>
+          <a:fontRef idx="minor">
+            <a:schemeClr val="lt1"/>
+          </a:fontRef>
+        </p:style>
+        <p:txBody>
+          <a:bodyPr rtlCol="0" anchor="ctr"/>
+          <a:lstStyle/>
+          <a:p>
+            <a:pPr algn="ctr"/>
+            <a:endParaRPr lang="en-US"/>
+          </a:p>
+        </p:txBody>
+      </p:sp>
+      <p:sp>
+        <p:nvSpPr>
+          <p:cNvPr id="18" name="Rectangle 17">
+            <a:extLst>
+              <a:ext uri="{FF2B5EF4-FFF2-40B4-BE49-F238E27FC236}">
+                <a16:creationId xmlns:a16="http://schemas.microsoft.com/office/drawing/2014/main" id="{91E5A9A7-95C6-4F4F-B00E-C82E07FE62EF}"/>
+              </a:ext>
+              <a:ext uri="{C183D7F6-B498-43B3-948B-1728B52AA6E4}">
+                <adec:decorative xmlns:adec="http://schemas.microsoft.com/office/drawing/2017/decorative" val="1"/>
+              </a:ext>
+            </a:extLst>
+          </p:cNvPr>
+          <p:cNvSpPr>
+            <a:spLocks noGrp="1" noRot="1" noChangeAspect="1" noMove="1" noResize="1" noEditPoints="1" noAdjustHandles="1" noChangeArrowheads="1" noChangeShapeType="1" noTextEdit="1"/>
+          </p:cNvSpPr>
+          <p:nvPr>
+            <p:extLst>
+              <p:ext uri="{386F3935-93C4-4BCD-93E2-E3B085C9AB24}">
+                <p16:designElem xmlns:p16="http://schemas.microsoft.com/office/powerpoint/2015/main" val="1"/>
+              </p:ext>
+            </p:extLst>
+          </p:nvPr>
+        </p:nvSpPr>
+        <p:spPr>
+          <a:xfrm rot="5400000" flipH="1">
+            <a:off x="-1417539" y="1417538"/>
+            <a:ext cx="6875818" cy="4040744"/>
+          </a:xfrm>
+          <a:prstGeom prst="rect">
+            <a:avLst/>
+          </a:prstGeom>
+          <a:gradFill>
+            <a:gsLst>
+              <a:gs pos="0">
+                <a:srgbClr val="000000"/>
+              </a:gs>
+              <a:gs pos="100000">
+                <a:schemeClr val="accent1">
+                  <a:lumMod val="75000"/>
+                </a:schemeClr>
+              </a:gs>
+            </a:gsLst>
+            <a:lin ang="18600000" scaled="0"/>
+          </a:gradFill>
+          <a:ln>
+            <a:noFill/>
+          </a:ln>
+        </p:spPr>
+        <p:style>
+          <a:lnRef idx="2">
+            <a:schemeClr val="accent1">
+              <a:shade val="50000"/>
+            </a:schemeClr>
+          </a:lnRef>
+          <a:fillRef idx="1">
+            <a:schemeClr val="accent1"/>
+          </a:fillRef>
+          <a:effectRef idx="0">
+            <a:schemeClr val="accent1"/>
+          </a:effectRef>
+          <a:fontRef idx="minor">
+            <a:schemeClr val="lt1"/>
+          </a:fontRef>
+        </p:style>
+        <p:txBody>
+          <a:bodyPr rtlCol="0" anchor="ctr"/>
+          <a:lstStyle/>
+          <a:p>
+            <a:pPr algn="ctr"/>
+            <a:endParaRPr lang="en-US" dirty="0"/>
+          </a:p>
+        </p:txBody>
+      </p:sp>
+      <p:sp>
+        <p:nvSpPr>
+          <p:cNvPr id="20" name="Rectangle 19">
+            <a:extLst>
+              <a:ext uri="{FF2B5EF4-FFF2-40B4-BE49-F238E27FC236}">
+                <a16:creationId xmlns:a16="http://schemas.microsoft.com/office/drawing/2014/main" id="{D07DD2DE-F619-49DD-B5E7-03A290FF4ED1}"/>
+              </a:ext>
+              <a:ext uri="{C183D7F6-B498-43B3-948B-1728B52AA6E4}">
+                <adec:decorative xmlns:adec="http://schemas.microsoft.com/office/drawing/2017/decorative" val="1"/>
+              </a:ext>
+            </a:extLst>
+          </p:cNvPr>
+          <p:cNvSpPr>
+            <a:spLocks noGrp="1" noRot="1" noChangeAspect="1" noMove="1" noResize="1" noEditPoints="1" noAdjustHandles="1" noChangeArrowheads="1" noChangeShapeType="1" noTextEdit="1"/>
+          </p:cNvSpPr>
+          <p:nvPr>
+            <p:extLst>
+              <p:ext uri="{386F3935-93C4-4BCD-93E2-E3B085C9AB24}">
+                <p16:designElem xmlns:p16="http://schemas.microsoft.com/office/powerpoint/2015/main" val="1"/>
+              </p:ext>
+            </p:extLst>
+          </p:nvPr>
+        </p:nvSpPr>
+        <p:spPr>
+          <a:xfrm rot="16200000">
+            <a:off x="-158495" y="2660473"/>
+            <a:ext cx="4355594" cy="4038603"/>
+          </a:xfrm>
+          <a:prstGeom prst="rect">
+            <a:avLst/>
+          </a:prstGeom>
+          <a:gradFill>
+            <a:gsLst>
+              <a:gs pos="0">
+                <a:schemeClr val="accent1">
+                  <a:alpha val="50000"/>
+                </a:schemeClr>
+              </a:gs>
+              <a:gs pos="100000">
+                <a:schemeClr val="accent1">
+                  <a:lumMod val="50000"/>
+                  <a:alpha val="0"/>
+                </a:schemeClr>
+              </a:gs>
+            </a:gsLst>
+            <a:lin ang="11400000" scaled="0"/>
+          </a:gradFill>
+          <a:ln>
+            <a:noFill/>
+          </a:ln>
+        </p:spPr>
+        <p:style>
+          <a:lnRef idx="2">
+            <a:schemeClr val="accent1">
+              <a:shade val="50000"/>
+            </a:schemeClr>
+          </a:lnRef>
+          <a:fillRef idx="1">
+            <a:schemeClr val="accent1"/>
+          </a:fillRef>
+          <a:effectRef idx="0">
+            <a:schemeClr val="accent1"/>
+          </a:effectRef>
+          <a:fontRef idx="minor">
+            <a:schemeClr val="lt1"/>
+          </a:fontRef>
+        </p:style>
+        <p:txBody>
+          <a:bodyPr rtlCol="0" anchor="ctr"/>
+          <a:lstStyle/>
+          <a:p>
+            <a:pPr algn="ctr"/>
+            <a:endParaRPr lang="en-US"/>
+          </a:p>
+        </p:txBody>
+      </p:sp>
+      <p:sp>
+        <p:nvSpPr>
+          <p:cNvPr id="22" name="Rectangle 21">
+            <a:extLst>
+              <a:ext uri="{FF2B5EF4-FFF2-40B4-BE49-F238E27FC236}">
+                <a16:creationId xmlns:a16="http://schemas.microsoft.com/office/drawing/2014/main" id="{85149191-5F60-4A28-AAFF-039F96B0F3EC}"/>
+              </a:ext>
+              <a:ext uri="{C183D7F6-B498-43B3-948B-1728B52AA6E4}">
+                <adec:decorative xmlns:adec="http://schemas.microsoft.com/office/drawing/2017/decorative" val="1"/>
+              </a:ext>
+            </a:extLst>
+          </p:cNvPr>
+          <p:cNvSpPr>
+            <a:spLocks noGrp="1" noRot="1" noChangeAspect="1" noMove="1" noResize="1" noEditPoints="1" noAdjustHandles="1" noChangeArrowheads="1" noChangeShapeType="1" noTextEdit="1"/>
+          </p:cNvSpPr>
+          <p:nvPr>
+            <p:extLst>
+              <p:ext uri="{386F3935-93C4-4BCD-93E2-E3B085C9AB24}">
+                <p16:designElem xmlns:p16="http://schemas.microsoft.com/office/powerpoint/2015/main" val="1"/>
+              </p:ext>
+            </p:extLst>
+          </p:nvPr>
+        </p:nvSpPr>
+        <p:spPr>
+          <a:xfrm rot="16200000" flipH="1">
+            <a:off x="-1180882" y="1638085"/>
+            <a:ext cx="6857572" cy="3581401"/>
+          </a:xfrm>
+          <a:prstGeom prst="rect">
+            <a:avLst/>
+          </a:prstGeom>
+          <a:gradFill>
+            <a:gsLst>
+              <a:gs pos="0">
+                <a:srgbClr val="000000">
+                  <a:alpha val="59000"/>
+                </a:srgbClr>
+              </a:gs>
+              <a:gs pos="69000">
+                <a:schemeClr val="accent1">
+                  <a:alpha val="0"/>
+                </a:schemeClr>
+              </a:gs>
+            </a:gsLst>
+            <a:lin ang="13200000" scaled="0"/>
+          </a:gradFill>
+          <a:ln>
+            <a:noFill/>
+          </a:ln>
+        </p:spPr>
+        <p:style>
+          <a:lnRef idx="2">
+            <a:schemeClr val="accent1">
+              <a:shade val="50000"/>
+            </a:schemeClr>
+          </a:lnRef>
+          <a:fillRef idx="1">
+            <a:schemeClr val="accent1"/>
+          </a:fillRef>
+          <a:effectRef idx="0">
+            <a:schemeClr val="accent1"/>
+          </a:effectRef>
+          <a:fontRef idx="minor">
+            <a:schemeClr val="lt1"/>
+          </a:fontRef>
+        </p:style>
+        <p:txBody>
+          <a:bodyPr rtlCol="0" anchor="ctr"/>
+          <a:lstStyle/>
+          <a:p>
+            <a:pPr algn="ctr"/>
+            <a:endParaRPr lang="en-US" dirty="0"/>
+          </a:p>
+        </p:txBody>
+      </p:sp>
+      <p:sp>
+        <p:nvSpPr>
+          <p:cNvPr id="24" name="Freeform: Shape 23">
+            <a:extLst>
+              <a:ext uri="{FF2B5EF4-FFF2-40B4-BE49-F238E27FC236}">
+                <a16:creationId xmlns:a16="http://schemas.microsoft.com/office/drawing/2014/main" id="{F8260ED5-17F7-4158-B241-D51DD4CF1B7E}"/>
+              </a:ext>
+              <a:ext uri="{C183D7F6-B498-43B3-948B-1728B52AA6E4}">
+                <adec:decorative xmlns:adec="http://schemas.microsoft.com/office/drawing/2017/decorative" val="1"/>
+              </a:ext>
+            </a:extLst>
+          </p:cNvPr>
+          <p:cNvSpPr>
+            <a:spLocks noGrp="1" noRot="1" noChangeAspect="1" noMove="1" noResize="1" noEditPoints="1" noAdjustHandles="1" noChangeArrowheads="1" noChangeShapeType="1" noTextEdit="1"/>
+          </p:cNvSpPr>
+          <p:nvPr>
+            <p:extLst>
+              <p:ext uri="{386F3935-93C4-4BCD-93E2-E3B085C9AB24}">
+                <p16:designElem xmlns:p16="http://schemas.microsoft.com/office/powerpoint/2015/main" val="1"/>
+              </p:ext>
+            </p:extLst>
+          </p:nvPr>
+        </p:nvSpPr>
+        <p:spPr>
+          <a:xfrm rot="6097846">
+            <a:off x="-747355" y="1201312"/>
+            <a:ext cx="4808302" cy="4088666"/>
+          </a:xfrm>
+          <a:custGeom>
+            <a:avLst/>
+            <a:gdLst>
+              <a:gd name="connsiteX0" fmla="*/ 48844 w 4808302"/>
+              <a:gd name="connsiteY0" fmla="*/ 2888671 h 4088666"/>
+              <a:gd name="connsiteX1" fmla="*/ 0 w 4808302"/>
+              <a:gd name="connsiteY1" fmla="*/ 2404151 h 4088666"/>
+              <a:gd name="connsiteX2" fmla="*/ 2404151 w 4808302"/>
+              <a:gd name="connsiteY2" fmla="*/ 0 h 4088666"/>
+              <a:gd name="connsiteX3" fmla="*/ 4808302 w 4808302"/>
+              <a:gd name="connsiteY3" fmla="*/ 2404151 h 4088666"/>
+              <a:gd name="connsiteX4" fmla="*/ 4700216 w 4808302"/>
+              <a:gd name="connsiteY4" fmla="*/ 3119072 h 4088666"/>
+              <a:gd name="connsiteX5" fmla="*/ 4643143 w 4808302"/>
+              <a:gd name="connsiteY5" fmla="*/ 3275009 h 4088666"/>
+              <a:gd name="connsiteX6" fmla="*/ 690093 w 4808302"/>
+              <a:gd name="connsiteY6" fmla="*/ 4088666 h 4088666"/>
+              <a:gd name="connsiteX7" fmla="*/ 548991 w 4808302"/>
+              <a:gd name="connsiteY7" fmla="*/ 3933414 h 4088666"/>
+              <a:gd name="connsiteX8" fmla="*/ 48844 w 4808302"/>
+              <a:gd name="connsiteY8" fmla="*/ 2888671 h 4088666"/>
+            </a:gdLst>
+            <a:ahLst/>
+            <a:cxnLst>
+              <a:cxn ang="0">
+                <a:pos x="connsiteX0" y="connsiteY0"/>
+              </a:cxn>
+              <a:cxn ang="0">
+                <a:pos x="connsiteX1" y="connsiteY1"/>
+              </a:cxn>
+              <a:cxn ang="0">
+                <a:pos x="connsiteX2" y="connsiteY2"/>
+              </a:cxn>
+              <a:cxn ang="0">
+                <a:pos x="connsiteX3" y="connsiteY3"/>
+              </a:cxn>
+              <a:cxn ang="0">
+                <a:pos x="connsiteX4" y="connsiteY4"/>
+              </a:cxn>
+              <a:cxn ang="0">
+                <a:pos x="connsiteX5" y="connsiteY5"/>
+              </a:cxn>
+              <a:cxn ang="0">
+                <a:pos x="connsiteX6" y="connsiteY6"/>
+              </a:cxn>
+              <a:cxn ang="0">
+                <a:pos x="connsiteX7" y="connsiteY7"/>
+              </a:cxn>
+              <a:cxn ang="0">
+                <a:pos x="connsiteX8" y="connsiteY8"/>
+              </a:cxn>
+            </a:cxnLst>
+            <a:rect l="l" t="t" r="r" b="b"/>
+            <a:pathLst>
+              <a:path w="4808302" h="4088666">
+                <a:moveTo>
+                  <a:pt x="48844" y="2888671"/>
+                </a:moveTo>
+                <a:cubicBezTo>
+                  <a:pt x="16818" y="2732167"/>
+                  <a:pt x="0" y="2570123"/>
+                  <a:pt x="0" y="2404151"/>
+                </a:cubicBezTo>
+                <a:cubicBezTo>
+                  <a:pt x="0" y="1076375"/>
+                  <a:pt x="1076375" y="0"/>
+                  <a:pt x="2404151" y="0"/>
+                </a:cubicBezTo>
+                <a:cubicBezTo>
+                  <a:pt x="3731927" y="0"/>
+                  <a:pt x="4808302" y="1076375"/>
+                  <a:pt x="4808302" y="2404151"/>
+                </a:cubicBezTo>
+                <a:cubicBezTo>
+                  <a:pt x="4808302" y="2653109"/>
+                  <a:pt x="4770461" y="2893229"/>
+                  <a:pt x="4700216" y="3119072"/>
+                </a:cubicBezTo>
+                <a:lnTo>
+                  <a:pt x="4643143" y="3275009"/>
+                </a:lnTo>
+                <a:lnTo>
+                  <a:pt x="690093" y="4088666"/>
+                </a:lnTo>
+                <a:lnTo>
+                  <a:pt x="548991" y="3933414"/>
+                </a:lnTo>
+                <a:cubicBezTo>
+                  <a:pt x="304015" y="3636572"/>
+                  <a:pt x="128908" y="3279932"/>
+                  <a:pt x="48844" y="2888671"/>
+                </a:cubicBezTo>
+                <a:close/>
+              </a:path>
+            </a:pathLst>
+          </a:custGeom>
+          <a:gradFill>
+            <a:gsLst>
+              <a:gs pos="39000">
+                <a:schemeClr val="accent1">
+                  <a:lumMod val="60000"/>
+                  <a:lumOff val="40000"/>
+                  <a:alpha val="0"/>
+                </a:schemeClr>
+              </a:gs>
+              <a:gs pos="100000">
+                <a:schemeClr val="accent1">
+                  <a:lumMod val="75000"/>
+                  <a:alpha val="26000"/>
+                </a:schemeClr>
+              </a:gs>
+            </a:gsLst>
+            <a:lin ang="18600000" scaled="0"/>
+          </a:gradFill>
+          <a:ln>
+            <a:noFill/>
+          </a:ln>
+        </p:spPr>
+        <p:style>
+          <a:lnRef idx="2">
+            <a:schemeClr val="accent1">
+              <a:shade val="50000"/>
+            </a:schemeClr>
+          </a:lnRef>
+          <a:fillRef idx="1">
+            <a:schemeClr val="accent1"/>
+          </a:fillRef>
+          <a:effectRef idx="0">
+            <a:schemeClr val="accent1"/>
+          </a:effectRef>
+          <a:fontRef idx="minor">
+            <a:schemeClr val="lt1"/>
+          </a:fontRef>
+        </p:style>
+        <p:txBody>
+          <a:bodyPr wrap="square" rtlCol="0" anchor="ctr">
+            <a:noAutofit/>
+          </a:bodyPr>
+          <a:lstStyle/>
+          <a:p>
+            <a:pPr algn="ctr"/>
+            <a:endParaRPr lang="en-US" dirty="0"/>
+          </a:p>
+        </p:txBody>
+      </p:sp>
       <p:sp>
         <p:nvSpPr>
           <p:cNvPr id="2" name="Title 1">
@@ -3611,13 +5485,27 @@
             <p:ph type="title"/>
           </p:nvPr>
         </p:nvSpPr>
-        <p:spPr/>
-        <p:txBody>
-          <a:bodyPr/>
-          <a:lstStyle/>
-          <a:p>
-            <a:r>
-              <a:rPr lang="pl-PL" dirty="0"/>
+        <p:spPr>
+          <a:xfrm>
+            <a:off x="660041" y="2767106"/>
+            <a:ext cx="2880828" cy="3071906"/>
+          </a:xfrm>
+        </p:spPr>
+        <p:txBody>
+          <a:bodyPr vert="horz" lIns="91440" tIns="45720" rIns="91440" bIns="45720" rtlCol="0" anchor="t">
+            <a:normAutofit/>
+          </a:bodyPr>
+          <a:lstStyle/>
+          <a:p>
+            <a:r>
+              <a:rPr lang="en-US" sz="4000" kern="1200">
+                <a:solidFill>
+                  <a:srgbClr val="FFFFFF"/>
+                </a:solidFill>
+                <a:latin typeface="+mj-lt"/>
+                <a:ea typeface="+mj-ea"/>
+                <a:cs typeface="+mj-cs"/>
+              </a:rPr>
               <a:t>Schemat hurtowni</a:t>
             </a:r>
           </a:p>
@@ -3645,8 +5533,8 @@
         </p:blipFill>
         <p:spPr>
           <a:xfrm>
-            <a:off x="6343432" y="210376"/>
-            <a:ext cx="5686643" cy="6437247"/>
+            <a:off x="5501521" y="467208"/>
+            <a:ext cx="5227562" cy="5923584"/>
           </a:xfrm>
           <a:prstGeom prst="rect">
             <a:avLst/>
@@ -3669,6 +5557,14 @@
 <file path=ppt/slides/slide4.xml><?xml version="1.0" encoding="utf-8"?>
 <p:sld xmlns:a="http://schemas.openxmlformats.org/drawingml/2006/main" xmlns:r="http://schemas.openxmlformats.org/officeDocument/2006/relationships" xmlns:p="http://schemas.openxmlformats.org/presentationml/2006/main">
   <p:cSld>
+    <p:bg>
+      <p:bgPr>
+        <a:solidFill>
+          <a:schemeClr val="bg1"/>
+        </a:solidFill>
+        <a:effectLst/>
+      </p:bgPr>
+    </p:bg>
     <p:spTree>
       <p:nvGrpSpPr>
         <p:cNvPr id="1" name=""/>
@@ -3683,6 +5579,305 @@
           <a:chExt cx="0" cy="0"/>
         </a:xfrm>
       </p:grpSpPr>
+      <p:sp useBgFill="1">
+        <p:nvSpPr>
+          <p:cNvPr id="10" name="Rectangle 9">
+            <a:extLst>
+              <a:ext uri="{FF2B5EF4-FFF2-40B4-BE49-F238E27FC236}">
+                <a16:creationId xmlns:a16="http://schemas.microsoft.com/office/drawing/2014/main" id="{AB8C311F-7253-4AED-9701-7FC0708C41C7}"/>
+              </a:ext>
+              <a:ext uri="{C183D7F6-B498-43B3-948B-1728B52AA6E4}">
+                <adec:decorative xmlns:adec="http://schemas.microsoft.com/office/drawing/2017/decorative" val="1"/>
+              </a:ext>
+            </a:extLst>
+          </p:cNvPr>
+          <p:cNvSpPr>
+            <a:spLocks noGrp="1" noRot="1" noChangeAspect="1" noMove="1" noResize="1" noEditPoints="1" noAdjustHandles="1" noChangeArrowheads="1" noChangeShapeType="1" noTextEdit="1"/>
+          </p:cNvSpPr>
+          <p:nvPr>
+            <p:extLst>
+              <p:ext uri="{386F3935-93C4-4BCD-93E2-E3B085C9AB24}">
+                <p16:designElem xmlns:p16="http://schemas.microsoft.com/office/powerpoint/2015/main" val="1"/>
+              </p:ext>
+            </p:extLst>
+          </p:nvPr>
+        </p:nvSpPr>
+        <p:spPr>
+          <a:xfrm>
+            <a:off x="0" y="0"/>
+            <a:ext cx="12192000" cy="6858000"/>
+          </a:xfrm>
+          <a:prstGeom prst="rect">
+            <a:avLst/>
+          </a:prstGeom>
+          <a:ln w="12700" cap="flat" cmpd="sng" algn="ctr">
+            <a:noFill/>
+            <a:prstDash val="solid"/>
+            <a:miter lim="800000"/>
+          </a:ln>
+          <a:effectLst/>
+          <a:extLst>
+            <a:ext uri="{91240B29-F687-4F45-9708-019B960494DF}">
+              <a14:hiddenLine xmlns:a14="http://schemas.microsoft.com/office/drawing/2010/main" w="12700" cap="flat" cmpd="sng" algn="ctr">
+                <a:solidFill>
+                  <a:schemeClr val="accent1">
+                    <a:shade val="50000"/>
+                  </a:schemeClr>
+                </a:solidFill>
+                <a:prstDash val="solid"/>
+                <a:miter lim="800000"/>
+              </a14:hiddenLine>
+            </a:ext>
+          </a:extLst>
+        </p:spPr>
+        <p:style>
+          <a:lnRef idx="2">
+            <a:schemeClr val="accent1">
+              <a:shade val="50000"/>
+            </a:schemeClr>
+          </a:lnRef>
+          <a:fillRef idx="1">
+            <a:schemeClr val="accent1"/>
+          </a:fillRef>
+          <a:effectRef idx="0">
+            <a:schemeClr val="accent1"/>
+          </a:effectRef>
+          <a:fontRef idx="minor">
+            <a:schemeClr val="lt1"/>
+          </a:fontRef>
+        </p:style>
+        <p:txBody>
+          <a:bodyPr rtlCol="0" anchor="ctr"/>
+          <a:lstStyle/>
+          <a:p>
+            <a:pPr algn="ctr"/>
+            <a:endParaRPr lang="en-US"/>
+          </a:p>
+        </p:txBody>
+      </p:sp>
+      <p:sp>
+        <p:nvSpPr>
+          <p:cNvPr id="12" name="Rectangle 11">
+            <a:extLst>
+              <a:ext uri="{FF2B5EF4-FFF2-40B4-BE49-F238E27FC236}">
+                <a16:creationId xmlns:a16="http://schemas.microsoft.com/office/drawing/2014/main" id="{E2384209-CB15-4CDF-9D31-C44FD9A3F20D}"/>
+              </a:ext>
+              <a:ext uri="{C183D7F6-B498-43B3-948B-1728B52AA6E4}">
+                <adec:decorative xmlns:adec="http://schemas.microsoft.com/office/drawing/2017/decorative" val="1"/>
+              </a:ext>
+            </a:extLst>
+          </p:cNvPr>
+          <p:cNvSpPr>
+            <a:spLocks noGrp="1" noRot="1" noChangeAspect="1" noMove="1" noResize="1" noEditPoints="1" noAdjustHandles="1" noChangeArrowheads="1" noChangeShapeType="1" noTextEdit="1"/>
+          </p:cNvSpPr>
+          <p:nvPr>
+            <p:extLst>
+              <p:ext uri="{386F3935-93C4-4BCD-93E2-E3B085C9AB24}">
+                <p16:designElem xmlns:p16="http://schemas.microsoft.com/office/powerpoint/2015/main" val="1"/>
+              </p:ext>
+            </p:extLst>
+          </p:nvPr>
+        </p:nvSpPr>
+        <p:spPr>
+          <a:xfrm rot="16200000" flipH="1">
+            <a:off x="2666617" y="-2666188"/>
+            <a:ext cx="6858000" cy="12191233"/>
+          </a:xfrm>
+          <a:prstGeom prst="rect">
+            <a:avLst/>
+          </a:prstGeom>
+          <a:gradFill>
+            <a:gsLst>
+              <a:gs pos="8000">
+                <a:schemeClr val="accent1"/>
+              </a:gs>
+              <a:gs pos="100000">
+                <a:schemeClr val="accent1">
+                  <a:lumMod val="50000"/>
+                </a:schemeClr>
+              </a:gs>
+            </a:gsLst>
+            <a:lin ang="12000000" scaled="0"/>
+          </a:gradFill>
+          <a:ln>
+            <a:noFill/>
+          </a:ln>
+        </p:spPr>
+        <p:style>
+          <a:lnRef idx="2">
+            <a:schemeClr val="accent1">
+              <a:shade val="50000"/>
+            </a:schemeClr>
+          </a:lnRef>
+          <a:fillRef idx="1">
+            <a:schemeClr val="accent1"/>
+          </a:fillRef>
+          <a:effectRef idx="0">
+            <a:schemeClr val="accent1"/>
+          </a:effectRef>
+          <a:fontRef idx="minor">
+            <a:schemeClr val="lt1"/>
+          </a:fontRef>
+        </p:style>
+        <p:txBody>
+          <a:bodyPr rtlCol="0" anchor="ctr"/>
+          <a:lstStyle/>
+          <a:p>
+            <a:pPr algn="ctr"/>
+            <a:endParaRPr lang="en-US"/>
+          </a:p>
+        </p:txBody>
+      </p:sp>
+      <p:sp>
+        <p:nvSpPr>
+          <p:cNvPr id="14" name="Rectangle 13">
+            <a:extLst>
+              <a:ext uri="{FF2B5EF4-FFF2-40B4-BE49-F238E27FC236}">
+                <a16:creationId xmlns:a16="http://schemas.microsoft.com/office/drawing/2014/main" id="{2633B3B5-CC90-43F0-8714-D31D1F3F0209}"/>
+              </a:ext>
+              <a:ext uri="{C183D7F6-B498-43B3-948B-1728B52AA6E4}">
+                <adec:decorative xmlns:adec="http://schemas.microsoft.com/office/drawing/2017/decorative" val="1"/>
+              </a:ext>
+            </a:extLst>
+          </p:cNvPr>
+          <p:cNvSpPr>
+            <a:spLocks noGrp="1" noRot="1" noChangeAspect="1" noMove="1" noResize="1" noEditPoints="1" noAdjustHandles="1" noChangeArrowheads="1" noChangeShapeType="1" noTextEdit="1"/>
+          </p:cNvSpPr>
+          <p:nvPr>
+            <p:extLst>
+              <p:ext uri="{386F3935-93C4-4BCD-93E2-E3B085C9AB24}">
+                <p16:designElem xmlns:p16="http://schemas.microsoft.com/office/powerpoint/2015/main" val="1"/>
+              </p:ext>
+            </p:extLst>
+          </p:nvPr>
+        </p:nvSpPr>
+        <p:spPr>
+          <a:xfrm rot="10800000" flipH="1">
+            <a:off x="-2311" y="0"/>
+            <a:ext cx="9070846" cy="6857572"/>
+          </a:xfrm>
+          <a:prstGeom prst="rect">
+            <a:avLst/>
+          </a:prstGeom>
+          <a:gradFill>
+            <a:gsLst>
+              <a:gs pos="8000">
+                <a:srgbClr val="000000">
+                  <a:alpha val="52000"/>
+                </a:srgbClr>
+              </a:gs>
+              <a:gs pos="100000">
+                <a:schemeClr val="accent1"/>
+              </a:gs>
+            </a:gsLst>
+            <a:lin ang="4800000" scaled="0"/>
+          </a:gradFill>
+          <a:ln>
+            <a:noFill/>
+          </a:ln>
+        </p:spPr>
+        <p:style>
+          <a:lnRef idx="2">
+            <a:schemeClr val="accent1">
+              <a:shade val="50000"/>
+            </a:schemeClr>
+          </a:lnRef>
+          <a:fillRef idx="1">
+            <a:schemeClr val="accent1"/>
+          </a:fillRef>
+          <a:effectRef idx="0">
+            <a:schemeClr val="accent1"/>
+          </a:effectRef>
+          <a:fontRef idx="minor">
+            <a:schemeClr val="lt1"/>
+          </a:fontRef>
+        </p:style>
+        <p:txBody>
+          <a:bodyPr rtlCol="0" anchor="ctr"/>
+          <a:lstStyle/>
+          <a:p>
+            <a:pPr algn="ctr"/>
+            <a:endParaRPr lang="en-US"/>
+          </a:p>
+        </p:txBody>
+      </p:sp>
+      <p:sp>
+        <p:nvSpPr>
+          <p:cNvPr id="16" name="Rectangle 15">
+            <a:extLst>
+              <a:ext uri="{FF2B5EF4-FFF2-40B4-BE49-F238E27FC236}">
+                <a16:creationId xmlns:a16="http://schemas.microsoft.com/office/drawing/2014/main" id="{A8D57A06-A426-446D-B02C-A2DC6B62E45E}"/>
+              </a:ext>
+              <a:ext uri="{C183D7F6-B498-43B3-948B-1728B52AA6E4}">
+                <adec:decorative xmlns:adec="http://schemas.microsoft.com/office/drawing/2017/decorative" val="1"/>
+              </a:ext>
+            </a:extLst>
+          </p:cNvPr>
+          <p:cNvSpPr>
+            <a:spLocks noGrp="1" noRot="1" noChangeAspect="1" noMove="1" noResize="1" noEditPoints="1" noAdjustHandles="1" noChangeArrowheads="1" noChangeShapeType="1" noTextEdit="1"/>
+          </p:cNvSpPr>
+          <p:nvPr>
+            <p:extLst>
+              <p:ext uri="{386F3935-93C4-4BCD-93E2-E3B085C9AB24}">
+                <p16:designElem xmlns:p16="http://schemas.microsoft.com/office/powerpoint/2015/main" val="1"/>
+              </p:ext>
+            </p:extLst>
+          </p:nvPr>
+        </p:nvSpPr>
+        <p:spPr>
+          <a:xfrm rot="16200000" flipH="1">
+            <a:off x="3649491" y="-1685840"/>
+            <a:ext cx="4894564" cy="12193546"/>
+          </a:xfrm>
+          <a:prstGeom prst="rect">
+            <a:avLst/>
+          </a:prstGeom>
+          <a:gradFill>
+            <a:gsLst>
+              <a:gs pos="0">
+                <a:schemeClr val="accent5">
+                  <a:lumMod val="60000"/>
+                  <a:lumOff val="40000"/>
+                  <a:alpha val="0"/>
+                </a:schemeClr>
+              </a:gs>
+              <a:gs pos="100000">
+                <a:srgbClr val="000000">
+                  <a:alpha val="46000"/>
+                </a:srgbClr>
+              </a:gs>
+            </a:gsLst>
+            <a:lin ang="1200000" scaled="0"/>
+          </a:gradFill>
+          <a:ln>
+            <a:noFill/>
+          </a:ln>
+        </p:spPr>
+        <p:style>
+          <a:lnRef idx="2">
+            <a:schemeClr val="accent1">
+              <a:shade val="50000"/>
+            </a:schemeClr>
+          </a:lnRef>
+          <a:fillRef idx="1">
+            <a:schemeClr val="accent1"/>
+          </a:fillRef>
+          <a:effectRef idx="0">
+            <a:schemeClr val="accent1"/>
+          </a:effectRef>
+          <a:fontRef idx="minor">
+            <a:schemeClr val="lt1"/>
+          </a:fontRef>
+        </p:style>
+        <p:txBody>
+          <a:bodyPr rtlCol="0" anchor="ctr"/>
+          <a:lstStyle/>
+          <a:p>
+            <a:pPr algn="ctr"/>
+            <a:endParaRPr lang="en-US"/>
+          </a:p>
+        </p:txBody>
+      </p:sp>
       <p:pic>
         <p:nvPicPr>
           <p:cNvPr id="5" name="Picture 4">
@@ -3705,8 +5900,8 @@
         </p:blipFill>
         <p:spPr>
           <a:xfrm>
-            <a:off x="581025" y="314060"/>
-            <a:ext cx="11029950" cy="6229879"/>
+            <a:off x="836176" y="457200"/>
+            <a:ext cx="10519648" cy="5943600"/>
           </a:xfrm>
           <a:prstGeom prst="rect">
             <a:avLst/>
@@ -3729,6 +5924,14 @@
 <file path=ppt/slides/slide5.xml><?xml version="1.0" encoding="utf-8"?>
 <p:sld xmlns:a="http://schemas.openxmlformats.org/drawingml/2006/main" xmlns:r="http://schemas.openxmlformats.org/officeDocument/2006/relationships" xmlns:p="http://schemas.openxmlformats.org/presentationml/2006/main">
   <p:cSld>
+    <p:bg>
+      <p:bgPr>
+        <a:solidFill>
+          <a:schemeClr val="bg1"/>
+        </a:solidFill>
+        <a:effectLst/>
+      </p:bgPr>
+    </p:bg>
     <p:spTree>
       <p:nvGrpSpPr>
         <p:cNvPr id="1" name="">
@@ -3749,6 +5952,305 @@
           <a:chExt cx="0" cy="0"/>
         </a:xfrm>
       </p:grpSpPr>
+      <p:sp useBgFill="1">
+        <p:nvSpPr>
+          <p:cNvPr id="8" name="Rectangle 7">
+            <a:extLst>
+              <a:ext uri="{FF2B5EF4-FFF2-40B4-BE49-F238E27FC236}">
+                <a16:creationId xmlns:a16="http://schemas.microsoft.com/office/drawing/2014/main" id="{AB8C311F-7253-4AED-9701-7FC0708C41C7}"/>
+              </a:ext>
+              <a:ext uri="{C183D7F6-B498-43B3-948B-1728B52AA6E4}">
+                <adec:decorative xmlns:adec="http://schemas.microsoft.com/office/drawing/2017/decorative" val="1"/>
+              </a:ext>
+            </a:extLst>
+          </p:cNvPr>
+          <p:cNvSpPr>
+            <a:spLocks noGrp="1" noRot="1" noChangeAspect="1" noMove="1" noResize="1" noEditPoints="1" noAdjustHandles="1" noChangeArrowheads="1" noChangeShapeType="1" noTextEdit="1"/>
+          </p:cNvSpPr>
+          <p:nvPr>
+            <p:extLst>
+              <p:ext uri="{386F3935-93C4-4BCD-93E2-E3B085C9AB24}">
+                <p16:designElem xmlns:p16="http://schemas.microsoft.com/office/powerpoint/2015/main" val="1"/>
+              </p:ext>
+            </p:extLst>
+          </p:nvPr>
+        </p:nvSpPr>
+        <p:spPr>
+          <a:xfrm>
+            <a:off x="0" y="0"/>
+            <a:ext cx="12192000" cy="6858000"/>
+          </a:xfrm>
+          <a:prstGeom prst="rect">
+            <a:avLst/>
+          </a:prstGeom>
+          <a:ln w="12700" cap="flat" cmpd="sng" algn="ctr">
+            <a:noFill/>
+            <a:prstDash val="solid"/>
+            <a:miter lim="800000"/>
+          </a:ln>
+          <a:effectLst/>
+          <a:extLst>
+            <a:ext uri="{91240B29-F687-4F45-9708-019B960494DF}">
+              <a14:hiddenLine xmlns:a14="http://schemas.microsoft.com/office/drawing/2010/main" w="12700" cap="flat" cmpd="sng" algn="ctr">
+                <a:solidFill>
+                  <a:schemeClr val="accent1">
+                    <a:shade val="50000"/>
+                  </a:schemeClr>
+                </a:solidFill>
+                <a:prstDash val="solid"/>
+                <a:miter lim="800000"/>
+              </a14:hiddenLine>
+            </a:ext>
+          </a:extLst>
+        </p:spPr>
+        <p:style>
+          <a:lnRef idx="2">
+            <a:schemeClr val="accent1">
+              <a:shade val="50000"/>
+            </a:schemeClr>
+          </a:lnRef>
+          <a:fillRef idx="1">
+            <a:schemeClr val="accent1"/>
+          </a:fillRef>
+          <a:effectRef idx="0">
+            <a:schemeClr val="accent1"/>
+          </a:effectRef>
+          <a:fontRef idx="minor">
+            <a:schemeClr val="lt1"/>
+          </a:fontRef>
+        </p:style>
+        <p:txBody>
+          <a:bodyPr rtlCol="0" anchor="ctr"/>
+          <a:lstStyle/>
+          <a:p>
+            <a:pPr algn="ctr"/>
+            <a:endParaRPr lang="en-US"/>
+          </a:p>
+        </p:txBody>
+      </p:sp>
+      <p:sp>
+        <p:nvSpPr>
+          <p:cNvPr id="10" name="Rectangle 9">
+            <a:extLst>
+              <a:ext uri="{FF2B5EF4-FFF2-40B4-BE49-F238E27FC236}">
+                <a16:creationId xmlns:a16="http://schemas.microsoft.com/office/drawing/2014/main" id="{E2384209-CB15-4CDF-9D31-C44FD9A3F20D}"/>
+              </a:ext>
+              <a:ext uri="{C183D7F6-B498-43B3-948B-1728B52AA6E4}">
+                <adec:decorative xmlns:adec="http://schemas.microsoft.com/office/drawing/2017/decorative" val="1"/>
+              </a:ext>
+            </a:extLst>
+          </p:cNvPr>
+          <p:cNvSpPr>
+            <a:spLocks noGrp="1" noRot="1" noChangeAspect="1" noMove="1" noResize="1" noEditPoints="1" noAdjustHandles="1" noChangeArrowheads="1" noChangeShapeType="1" noTextEdit="1"/>
+          </p:cNvSpPr>
+          <p:nvPr>
+            <p:extLst>
+              <p:ext uri="{386F3935-93C4-4BCD-93E2-E3B085C9AB24}">
+                <p16:designElem xmlns:p16="http://schemas.microsoft.com/office/powerpoint/2015/main" val="1"/>
+              </p:ext>
+            </p:extLst>
+          </p:nvPr>
+        </p:nvSpPr>
+        <p:spPr>
+          <a:xfrm rot="16200000" flipH="1">
+            <a:off x="2666617" y="-2666188"/>
+            <a:ext cx="6858000" cy="12191233"/>
+          </a:xfrm>
+          <a:prstGeom prst="rect">
+            <a:avLst/>
+          </a:prstGeom>
+          <a:gradFill>
+            <a:gsLst>
+              <a:gs pos="8000">
+                <a:schemeClr val="accent1"/>
+              </a:gs>
+              <a:gs pos="100000">
+                <a:schemeClr val="accent1">
+                  <a:lumMod val="50000"/>
+                </a:schemeClr>
+              </a:gs>
+            </a:gsLst>
+            <a:lin ang="12000000" scaled="0"/>
+          </a:gradFill>
+          <a:ln>
+            <a:noFill/>
+          </a:ln>
+        </p:spPr>
+        <p:style>
+          <a:lnRef idx="2">
+            <a:schemeClr val="accent1">
+              <a:shade val="50000"/>
+            </a:schemeClr>
+          </a:lnRef>
+          <a:fillRef idx="1">
+            <a:schemeClr val="accent1"/>
+          </a:fillRef>
+          <a:effectRef idx="0">
+            <a:schemeClr val="accent1"/>
+          </a:effectRef>
+          <a:fontRef idx="minor">
+            <a:schemeClr val="lt1"/>
+          </a:fontRef>
+        </p:style>
+        <p:txBody>
+          <a:bodyPr rtlCol="0" anchor="ctr"/>
+          <a:lstStyle/>
+          <a:p>
+            <a:pPr algn="ctr"/>
+            <a:endParaRPr lang="en-US"/>
+          </a:p>
+        </p:txBody>
+      </p:sp>
+      <p:sp>
+        <p:nvSpPr>
+          <p:cNvPr id="12" name="Rectangle 11">
+            <a:extLst>
+              <a:ext uri="{FF2B5EF4-FFF2-40B4-BE49-F238E27FC236}">
+                <a16:creationId xmlns:a16="http://schemas.microsoft.com/office/drawing/2014/main" id="{2633B3B5-CC90-43F0-8714-D31D1F3F0209}"/>
+              </a:ext>
+              <a:ext uri="{C183D7F6-B498-43B3-948B-1728B52AA6E4}">
+                <adec:decorative xmlns:adec="http://schemas.microsoft.com/office/drawing/2017/decorative" val="1"/>
+              </a:ext>
+            </a:extLst>
+          </p:cNvPr>
+          <p:cNvSpPr>
+            <a:spLocks noGrp="1" noRot="1" noChangeAspect="1" noMove="1" noResize="1" noEditPoints="1" noAdjustHandles="1" noChangeArrowheads="1" noChangeShapeType="1" noTextEdit="1"/>
+          </p:cNvSpPr>
+          <p:nvPr>
+            <p:extLst>
+              <p:ext uri="{386F3935-93C4-4BCD-93E2-E3B085C9AB24}">
+                <p16:designElem xmlns:p16="http://schemas.microsoft.com/office/powerpoint/2015/main" val="1"/>
+              </p:ext>
+            </p:extLst>
+          </p:nvPr>
+        </p:nvSpPr>
+        <p:spPr>
+          <a:xfrm rot="10800000" flipH="1">
+            <a:off x="-2311" y="0"/>
+            <a:ext cx="9070846" cy="6857572"/>
+          </a:xfrm>
+          <a:prstGeom prst="rect">
+            <a:avLst/>
+          </a:prstGeom>
+          <a:gradFill>
+            <a:gsLst>
+              <a:gs pos="8000">
+                <a:srgbClr val="000000">
+                  <a:alpha val="52000"/>
+                </a:srgbClr>
+              </a:gs>
+              <a:gs pos="100000">
+                <a:schemeClr val="accent1"/>
+              </a:gs>
+            </a:gsLst>
+            <a:lin ang="4800000" scaled="0"/>
+          </a:gradFill>
+          <a:ln>
+            <a:noFill/>
+          </a:ln>
+        </p:spPr>
+        <p:style>
+          <a:lnRef idx="2">
+            <a:schemeClr val="accent1">
+              <a:shade val="50000"/>
+            </a:schemeClr>
+          </a:lnRef>
+          <a:fillRef idx="1">
+            <a:schemeClr val="accent1"/>
+          </a:fillRef>
+          <a:effectRef idx="0">
+            <a:schemeClr val="accent1"/>
+          </a:effectRef>
+          <a:fontRef idx="minor">
+            <a:schemeClr val="lt1"/>
+          </a:fontRef>
+        </p:style>
+        <p:txBody>
+          <a:bodyPr rtlCol="0" anchor="ctr"/>
+          <a:lstStyle/>
+          <a:p>
+            <a:pPr algn="ctr"/>
+            <a:endParaRPr lang="en-US"/>
+          </a:p>
+        </p:txBody>
+      </p:sp>
+      <p:sp>
+        <p:nvSpPr>
+          <p:cNvPr id="14" name="Rectangle 13">
+            <a:extLst>
+              <a:ext uri="{FF2B5EF4-FFF2-40B4-BE49-F238E27FC236}">
+                <a16:creationId xmlns:a16="http://schemas.microsoft.com/office/drawing/2014/main" id="{A8D57A06-A426-446D-B02C-A2DC6B62E45E}"/>
+              </a:ext>
+              <a:ext uri="{C183D7F6-B498-43B3-948B-1728B52AA6E4}">
+                <adec:decorative xmlns:adec="http://schemas.microsoft.com/office/drawing/2017/decorative" val="1"/>
+              </a:ext>
+            </a:extLst>
+          </p:cNvPr>
+          <p:cNvSpPr>
+            <a:spLocks noGrp="1" noRot="1" noChangeAspect="1" noMove="1" noResize="1" noEditPoints="1" noAdjustHandles="1" noChangeArrowheads="1" noChangeShapeType="1" noTextEdit="1"/>
+          </p:cNvSpPr>
+          <p:nvPr>
+            <p:extLst>
+              <p:ext uri="{386F3935-93C4-4BCD-93E2-E3B085C9AB24}">
+                <p16:designElem xmlns:p16="http://schemas.microsoft.com/office/powerpoint/2015/main" val="1"/>
+              </p:ext>
+            </p:extLst>
+          </p:nvPr>
+        </p:nvSpPr>
+        <p:spPr>
+          <a:xfrm rot="16200000" flipH="1">
+            <a:off x="3649491" y="-1685840"/>
+            <a:ext cx="4894564" cy="12193546"/>
+          </a:xfrm>
+          <a:prstGeom prst="rect">
+            <a:avLst/>
+          </a:prstGeom>
+          <a:gradFill>
+            <a:gsLst>
+              <a:gs pos="0">
+                <a:schemeClr val="accent5">
+                  <a:lumMod val="60000"/>
+                  <a:lumOff val="40000"/>
+                  <a:alpha val="0"/>
+                </a:schemeClr>
+              </a:gs>
+              <a:gs pos="100000">
+                <a:srgbClr val="000000">
+                  <a:alpha val="46000"/>
+                </a:srgbClr>
+              </a:gs>
+            </a:gsLst>
+            <a:lin ang="1200000" scaled="0"/>
+          </a:gradFill>
+          <a:ln>
+            <a:noFill/>
+          </a:ln>
+        </p:spPr>
+        <p:style>
+          <a:lnRef idx="2">
+            <a:schemeClr val="accent1">
+              <a:shade val="50000"/>
+            </a:schemeClr>
+          </a:lnRef>
+          <a:fillRef idx="1">
+            <a:schemeClr val="accent1"/>
+          </a:fillRef>
+          <a:effectRef idx="0">
+            <a:schemeClr val="accent1"/>
+          </a:effectRef>
+          <a:fontRef idx="minor">
+            <a:schemeClr val="lt1"/>
+          </a:fontRef>
+        </p:style>
+        <p:txBody>
+          <a:bodyPr rtlCol="0" anchor="ctr"/>
+          <a:lstStyle/>
+          <a:p>
+            <a:pPr algn="ctr"/>
+            <a:endParaRPr lang="en-US"/>
+          </a:p>
+        </p:txBody>
+      </p:sp>
       <p:pic>
         <p:nvPicPr>
           <p:cNvPr id="3" name="Picture 2">
@@ -3771,8 +6273,8 @@
         </p:blipFill>
         <p:spPr>
           <a:xfrm>
-            <a:off x="924868" y="458052"/>
-            <a:ext cx="10342263" cy="5941896"/>
+            <a:off x="927652" y="457200"/>
+            <a:ext cx="10336695" cy="5943600"/>
           </a:xfrm>
           <a:prstGeom prst="rect">
             <a:avLst/>
@@ -3795,6 +6297,14 @@
 <file path=ppt/slides/slide6.xml><?xml version="1.0" encoding="utf-8"?>
 <p:sld xmlns:a="http://schemas.openxmlformats.org/drawingml/2006/main" xmlns:r="http://schemas.openxmlformats.org/officeDocument/2006/relationships" xmlns:p="http://schemas.openxmlformats.org/presentationml/2006/main">
   <p:cSld>
+    <p:bg>
+      <p:bgPr>
+        <a:solidFill>
+          <a:schemeClr val="bg1"/>
+        </a:solidFill>
+        <a:effectLst/>
+      </p:bgPr>
+    </p:bg>
     <p:spTree>
       <p:nvGrpSpPr>
         <p:cNvPr id="1" name="">
@@ -3815,6 +6325,305 @@
           <a:chExt cx="0" cy="0"/>
         </a:xfrm>
       </p:grpSpPr>
+      <p:sp useBgFill="1">
+        <p:nvSpPr>
+          <p:cNvPr id="8" name="Rectangle 7">
+            <a:extLst>
+              <a:ext uri="{FF2B5EF4-FFF2-40B4-BE49-F238E27FC236}">
+                <a16:creationId xmlns:a16="http://schemas.microsoft.com/office/drawing/2014/main" id="{AB8C311F-7253-4AED-9701-7FC0708C41C7}"/>
+              </a:ext>
+              <a:ext uri="{C183D7F6-B498-43B3-948B-1728B52AA6E4}">
+                <adec:decorative xmlns:adec="http://schemas.microsoft.com/office/drawing/2017/decorative" val="1"/>
+              </a:ext>
+            </a:extLst>
+          </p:cNvPr>
+          <p:cNvSpPr>
+            <a:spLocks noGrp="1" noRot="1" noChangeAspect="1" noMove="1" noResize="1" noEditPoints="1" noAdjustHandles="1" noChangeArrowheads="1" noChangeShapeType="1" noTextEdit="1"/>
+          </p:cNvSpPr>
+          <p:nvPr>
+            <p:extLst>
+              <p:ext uri="{386F3935-93C4-4BCD-93E2-E3B085C9AB24}">
+                <p16:designElem xmlns:p16="http://schemas.microsoft.com/office/powerpoint/2015/main" val="1"/>
+              </p:ext>
+            </p:extLst>
+          </p:nvPr>
+        </p:nvSpPr>
+        <p:spPr>
+          <a:xfrm>
+            <a:off x="0" y="0"/>
+            <a:ext cx="12192000" cy="6858000"/>
+          </a:xfrm>
+          <a:prstGeom prst="rect">
+            <a:avLst/>
+          </a:prstGeom>
+          <a:ln w="12700" cap="flat" cmpd="sng" algn="ctr">
+            <a:noFill/>
+            <a:prstDash val="solid"/>
+            <a:miter lim="800000"/>
+          </a:ln>
+          <a:effectLst/>
+          <a:extLst>
+            <a:ext uri="{91240B29-F687-4F45-9708-019B960494DF}">
+              <a14:hiddenLine xmlns:a14="http://schemas.microsoft.com/office/drawing/2010/main" w="12700" cap="flat" cmpd="sng" algn="ctr">
+                <a:solidFill>
+                  <a:schemeClr val="accent1">
+                    <a:shade val="50000"/>
+                  </a:schemeClr>
+                </a:solidFill>
+                <a:prstDash val="solid"/>
+                <a:miter lim="800000"/>
+              </a14:hiddenLine>
+            </a:ext>
+          </a:extLst>
+        </p:spPr>
+        <p:style>
+          <a:lnRef idx="2">
+            <a:schemeClr val="accent1">
+              <a:shade val="50000"/>
+            </a:schemeClr>
+          </a:lnRef>
+          <a:fillRef idx="1">
+            <a:schemeClr val="accent1"/>
+          </a:fillRef>
+          <a:effectRef idx="0">
+            <a:schemeClr val="accent1"/>
+          </a:effectRef>
+          <a:fontRef idx="minor">
+            <a:schemeClr val="lt1"/>
+          </a:fontRef>
+        </p:style>
+        <p:txBody>
+          <a:bodyPr rtlCol="0" anchor="ctr"/>
+          <a:lstStyle/>
+          <a:p>
+            <a:pPr algn="ctr"/>
+            <a:endParaRPr lang="en-US"/>
+          </a:p>
+        </p:txBody>
+      </p:sp>
+      <p:sp>
+        <p:nvSpPr>
+          <p:cNvPr id="10" name="Rectangle 9">
+            <a:extLst>
+              <a:ext uri="{FF2B5EF4-FFF2-40B4-BE49-F238E27FC236}">
+                <a16:creationId xmlns:a16="http://schemas.microsoft.com/office/drawing/2014/main" id="{E2384209-CB15-4CDF-9D31-C44FD9A3F20D}"/>
+              </a:ext>
+              <a:ext uri="{C183D7F6-B498-43B3-948B-1728B52AA6E4}">
+                <adec:decorative xmlns:adec="http://schemas.microsoft.com/office/drawing/2017/decorative" val="1"/>
+              </a:ext>
+            </a:extLst>
+          </p:cNvPr>
+          <p:cNvSpPr>
+            <a:spLocks noGrp="1" noRot="1" noChangeAspect="1" noMove="1" noResize="1" noEditPoints="1" noAdjustHandles="1" noChangeArrowheads="1" noChangeShapeType="1" noTextEdit="1"/>
+          </p:cNvSpPr>
+          <p:nvPr>
+            <p:extLst>
+              <p:ext uri="{386F3935-93C4-4BCD-93E2-E3B085C9AB24}">
+                <p16:designElem xmlns:p16="http://schemas.microsoft.com/office/powerpoint/2015/main" val="1"/>
+              </p:ext>
+            </p:extLst>
+          </p:nvPr>
+        </p:nvSpPr>
+        <p:spPr>
+          <a:xfrm rot="16200000" flipH="1">
+            <a:off x="2666617" y="-2666188"/>
+            <a:ext cx="6858000" cy="12191233"/>
+          </a:xfrm>
+          <a:prstGeom prst="rect">
+            <a:avLst/>
+          </a:prstGeom>
+          <a:gradFill>
+            <a:gsLst>
+              <a:gs pos="8000">
+                <a:schemeClr val="accent1"/>
+              </a:gs>
+              <a:gs pos="100000">
+                <a:schemeClr val="accent1">
+                  <a:lumMod val="50000"/>
+                </a:schemeClr>
+              </a:gs>
+            </a:gsLst>
+            <a:lin ang="12000000" scaled="0"/>
+          </a:gradFill>
+          <a:ln>
+            <a:noFill/>
+          </a:ln>
+        </p:spPr>
+        <p:style>
+          <a:lnRef idx="2">
+            <a:schemeClr val="accent1">
+              <a:shade val="50000"/>
+            </a:schemeClr>
+          </a:lnRef>
+          <a:fillRef idx="1">
+            <a:schemeClr val="accent1"/>
+          </a:fillRef>
+          <a:effectRef idx="0">
+            <a:schemeClr val="accent1"/>
+          </a:effectRef>
+          <a:fontRef idx="minor">
+            <a:schemeClr val="lt1"/>
+          </a:fontRef>
+        </p:style>
+        <p:txBody>
+          <a:bodyPr rtlCol="0" anchor="ctr"/>
+          <a:lstStyle/>
+          <a:p>
+            <a:pPr algn="ctr"/>
+            <a:endParaRPr lang="en-US"/>
+          </a:p>
+        </p:txBody>
+      </p:sp>
+      <p:sp>
+        <p:nvSpPr>
+          <p:cNvPr id="12" name="Rectangle 11">
+            <a:extLst>
+              <a:ext uri="{FF2B5EF4-FFF2-40B4-BE49-F238E27FC236}">
+                <a16:creationId xmlns:a16="http://schemas.microsoft.com/office/drawing/2014/main" id="{2633B3B5-CC90-43F0-8714-D31D1F3F0209}"/>
+              </a:ext>
+              <a:ext uri="{C183D7F6-B498-43B3-948B-1728B52AA6E4}">
+                <adec:decorative xmlns:adec="http://schemas.microsoft.com/office/drawing/2017/decorative" val="1"/>
+              </a:ext>
+            </a:extLst>
+          </p:cNvPr>
+          <p:cNvSpPr>
+            <a:spLocks noGrp="1" noRot="1" noChangeAspect="1" noMove="1" noResize="1" noEditPoints="1" noAdjustHandles="1" noChangeArrowheads="1" noChangeShapeType="1" noTextEdit="1"/>
+          </p:cNvSpPr>
+          <p:nvPr>
+            <p:extLst>
+              <p:ext uri="{386F3935-93C4-4BCD-93E2-E3B085C9AB24}">
+                <p16:designElem xmlns:p16="http://schemas.microsoft.com/office/powerpoint/2015/main" val="1"/>
+              </p:ext>
+            </p:extLst>
+          </p:nvPr>
+        </p:nvSpPr>
+        <p:spPr>
+          <a:xfrm rot="10800000" flipH="1">
+            <a:off x="-2311" y="0"/>
+            <a:ext cx="9070846" cy="6857572"/>
+          </a:xfrm>
+          <a:prstGeom prst="rect">
+            <a:avLst/>
+          </a:prstGeom>
+          <a:gradFill>
+            <a:gsLst>
+              <a:gs pos="8000">
+                <a:srgbClr val="000000">
+                  <a:alpha val="52000"/>
+                </a:srgbClr>
+              </a:gs>
+              <a:gs pos="100000">
+                <a:schemeClr val="accent1"/>
+              </a:gs>
+            </a:gsLst>
+            <a:lin ang="4800000" scaled="0"/>
+          </a:gradFill>
+          <a:ln>
+            <a:noFill/>
+          </a:ln>
+        </p:spPr>
+        <p:style>
+          <a:lnRef idx="2">
+            <a:schemeClr val="accent1">
+              <a:shade val="50000"/>
+            </a:schemeClr>
+          </a:lnRef>
+          <a:fillRef idx="1">
+            <a:schemeClr val="accent1"/>
+          </a:fillRef>
+          <a:effectRef idx="0">
+            <a:schemeClr val="accent1"/>
+          </a:effectRef>
+          <a:fontRef idx="minor">
+            <a:schemeClr val="lt1"/>
+          </a:fontRef>
+        </p:style>
+        <p:txBody>
+          <a:bodyPr rtlCol="0" anchor="ctr"/>
+          <a:lstStyle/>
+          <a:p>
+            <a:pPr algn="ctr"/>
+            <a:endParaRPr lang="en-US"/>
+          </a:p>
+        </p:txBody>
+      </p:sp>
+      <p:sp>
+        <p:nvSpPr>
+          <p:cNvPr id="14" name="Rectangle 13">
+            <a:extLst>
+              <a:ext uri="{FF2B5EF4-FFF2-40B4-BE49-F238E27FC236}">
+                <a16:creationId xmlns:a16="http://schemas.microsoft.com/office/drawing/2014/main" id="{A8D57A06-A426-446D-B02C-A2DC6B62E45E}"/>
+              </a:ext>
+              <a:ext uri="{C183D7F6-B498-43B3-948B-1728B52AA6E4}">
+                <adec:decorative xmlns:adec="http://schemas.microsoft.com/office/drawing/2017/decorative" val="1"/>
+              </a:ext>
+            </a:extLst>
+          </p:cNvPr>
+          <p:cNvSpPr>
+            <a:spLocks noGrp="1" noRot="1" noChangeAspect="1" noMove="1" noResize="1" noEditPoints="1" noAdjustHandles="1" noChangeArrowheads="1" noChangeShapeType="1" noTextEdit="1"/>
+          </p:cNvSpPr>
+          <p:nvPr>
+            <p:extLst>
+              <p:ext uri="{386F3935-93C4-4BCD-93E2-E3B085C9AB24}">
+                <p16:designElem xmlns:p16="http://schemas.microsoft.com/office/powerpoint/2015/main" val="1"/>
+              </p:ext>
+            </p:extLst>
+          </p:nvPr>
+        </p:nvSpPr>
+        <p:spPr>
+          <a:xfrm rot="16200000" flipH="1">
+            <a:off x="3649491" y="-1685840"/>
+            <a:ext cx="4894564" cy="12193546"/>
+          </a:xfrm>
+          <a:prstGeom prst="rect">
+            <a:avLst/>
+          </a:prstGeom>
+          <a:gradFill>
+            <a:gsLst>
+              <a:gs pos="0">
+                <a:schemeClr val="accent5">
+                  <a:lumMod val="60000"/>
+                  <a:lumOff val="40000"/>
+                  <a:alpha val="0"/>
+                </a:schemeClr>
+              </a:gs>
+              <a:gs pos="100000">
+                <a:srgbClr val="000000">
+                  <a:alpha val="46000"/>
+                </a:srgbClr>
+              </a:gs>
+            </a:gsLst>
+            <a:lin ang="1200000" scaled="0"/>
+          </a:gradFill>
+          <a:ln>
+            <a:noFill/>
+          </a:ln>
+        </p:spPr>
+        <p:style>
+          <a:lnRef idx="2">
+            <a:schemeClr val="accent1">
+              <a:shade val="50000"/>
+            </a:schemeClr>
+          </a:lnRef>
+          <a:fillRef idx="1">
+            <a:schemeClr val="accent1"/>
+          </a:fillRef>
+          <a:effectRef idx="0">
+            <a:schemeClr val="accent1"/>
+          </a:effectRef>
+          <a:fontRef idx="minor">
+            <a:schemeClr val="lt1"/>
+          </a:fontRef>
+        </p:style>
+        <p:txBody>
+          <a:bodyPr rtlCol="0" anchor="ctr"/>
+          <a:lstStyle/>
+          <a:p>
+            <a:pPr algn="ctr"/>
+            <a:endParaRPr lang="en-US"/>
+          </a:p>
+        </p:txBody>
+      </p:sp>
       <p:pic>
         <p:nvPicPr>
           <p:cNvPr id="3" name="Picture 2">
@@ -3837,8 +6646,8 @@
         </p:blipFill>
         <p:spPr>
           <a:xfrm>
-            <a:off x="1314450" y="504825"/>
-            <a:ext cx="9563100" cy="5848350"/>
+            <a:off x="1244082" y="457200"/>
+            <a:ext cx="9703836" cy="5943600"/>
           </a:xfrm>
           <a:prstGeom prst="rect">
             <a:avLst/>
@@ -3861,6 +6670,14 @@
 <file path=ppt/slides/slide7.xml><?xml version="1.0" encoding="utf-8"?>
 <p:sld xmlns:a="http://schemas.openxmlformats.org/drawingml/2006/main" xmlns:r="http://schemas.openxmlformats.org/officeDocument/2006/relationships" xmlns:p="http://schemas.openxmlformats.org/presentationml/2006/main">
   <p:cSld>
+    <p:bg>
+      <p:bgPr>
+        <a:solidFill>
+          <a:schemeClr val="bg1"/>
+        </a:solidFill>
+        <a:effectLst/>
+      </p:bgPr>
+    </p:bg>
     <p:spTree>
       <p:nvGrpSpPr>
         <p:cNvPr id="1" name="">
@@ -3881,6 +6698,305 @@
           <a:chExt cx="0" cy="0"/>
         </a:xfrm>
       </p:grpSpPr>
+      <p:sp useBgFill="1">
+        <p:nvSpPr>
+          <p:cNvPr id="8" name="Rectangle 7">
+            <a:extLst>
+              <a:ext uri="{FF2B5EF4-FFF2-40B4-BE49-F238E27FC236}">
+                <a16:creationId xmlns:a16="http://schemas.microsoft.com/office/drawing/2014/main" id="{AB8C311F-7253-4AED-9701-7FC0708C41C7}"/>
+              </a:ext>
+              <a:ext uri="{C183D7F6-B498-43B3-948B-1728B52AA6E4}">
+                <adec:decorative xmlns:adec="http://schemas.microsoft.com/office/drawing/2017/decorative" val="1"/>
+              </a:ext>
+            </a:extLst>
+          </p:cNvPr>
+          <p:cNvSpPr>
+            <a:spLocks noGrp="1" noRot="1" noChangeAspect="1" noMove="1" noResize="1" noEditPoints="1" noAdjustHandles="1" noChangeArrowheads="1" noChangeShapeType="1" noTextEdit="1"/>
+          </p:cNvSpPr>
+          <p:nvPr>
+            <p:extLst>
+              <p:ext uri="{386F3935-93C4-4BCD-93E2-E3B085C9AB24}">
+                <p16:designElem xmlns:p16="http://schemas.microsoft.com/office/powerpoint/2015/main" val="1"/>
+              </p:ext>
+            </p:extLst>
+          </p:nvPr>
+        </p:nvSpPr>
+        <p:spPr>
+          <a:xfrm>
+            <a:off x="0" y="0"/>
+            <a:ext cx="12192000" cy="6858000"/>
+          </a:xfrm>
+          <a:prstGeom prst="rect">
+            <a:avLst/>
+          </a:prstGeom>
+          <a:ln w="12700" cap="flat" cmpd="sng" algn="ctr">
+            <a:noFill/>
+            <a:prstDash val="solid"/>
+            <a:miter lim="800000"/>
+          </a:ln>
+          <a:effectLst/>
+          <a:extLst>
+            <a:ext uri="{91240B29-F687-4F45-9708-019B960494DF}">
+              <a14:hiddenLine xmlns:a14="http://schemas.microsoft.com/office/drawing/2010/main" w="12700" cap="flat" cmpd="sng" algn="ctr">
+                <a:solidFill>
+                  <a:schemeClr val="accent1">
+                    <a:shade val="50000"/>
+                  </a:schemeClr>
+                </a:solidFill>
+                <a:prstDash val="solid"/>
+                <a:miter lim="800000"/>
+              </a14:hiddenLine>
+            </a:ext>
+          </a:extLst>
+        </p:spPr>
+        <p:style>
+          <a:lnRef idx="2">
+            <a:schemeClr val="accent1">
+              <a:shade val="50000"/>
+            </a:schemeClr>
+          </a:lnRef>
+          <a:fillRef idx="1">
+            <a:schemeClr val="accent1"/>
+          </a:fillRef>
+          <a:effectRef idx="0">
+            <a:schemeClr val="accent1"/>
+          </a:effectRef>
+          <a:fontRef idx="minor">
+            <a:schemeClr val="lt1"/>
+          </a:fontRef>
+        </p:style>
+        <p:txBody>
+          <a:bodyPr rtlCol="0" anchor="ctr"/>
+          <a:lstStyle/>
+          <a:p>
+            <a:pPr algn="ctr"/>
+            <a:endParaRPr lang="en-US"/>
+          </a:p>
+        </p:txBody>
+      </p:sp>
+      <p:sp>
+        <p:nvSpPr>
+          <p:cNvPr id="10" name="Rectangle 9">
+            <a:extLst>
+              <a:ext uri="{FF2B5EF4-FFF2-40B4-BE49-F238E27FC236}">
+                <a16:creationId xmlns:a16="http://schemas.microsoft.com/office/drawing/2014/main" id="{E2384209-CB15-4CDF-9D31-C44FD9A3F20D}"/>
+              </a:ext>
+              <a:ext uri="{C183D7F6-B498-43B3-948B-1728B52AA6E4}">
+                <adec:decorative xmlns:adec="http://schemas.microsoft.com/office/drawing/2017/decorative" val="1"/>
+              </a:ext>
+            </a:extLst>
+          </p:cNvPr>
+          <p:cNvSpPr>
+            <a:spLocks noGrp="1" noRot="1" noChangeAspect="1" noMove="1" noResize="1" noEditPoints="1" noAdjustHandles="1" noChangeArrowheads="1" noChangeShapeType="1" noTextEdit="1"/>
+          </p:cNvSpPr>
+          <p:nvPr>
+            <p:extLst>
+              <p:ext uri="{386F3935-93C4-4BCD-93E2-E3B085C9AB24}">
+                <p16:designElem xmlns:p16="http://schemas.microsoft.com/office/powerpoint/2015/main" val="1"/>
+              </p:ext>
+            </p:extLst>
+          </p:nvPr>
+        </p:nvSpPr>
+        <p:spPr>
+          <a:xfrm rot="16200000" flipH="1">
+            <a:off x="2666617" y="-2666188"/>
+            <a:ext cx="6858000" cy="12191233"/>
+          </a:xfrm>
+          <a:prstGeom prst="rect">
+            <a:avLst/>
+          </a:prstGeom>
+          <a:gradFill>
+            <a:gsLst>
+              <a:gs pos="8000">
+                <a:schemeClr val="accent1"/>
+              </a:gs>
+              <a:gs pos="100000">
+                <a:schemeClr val="accent1">
+                  <a:lumMod val="50000"/>
+                </a:schemeClr>
+              </a:gs>
+            </a:gsLst>
+            <a:lin ang="12000000" scaled="0"/>
+          </a:gradFill>
+          <a:ln>
+            <a:noFill/>
+          </a:ln>
+        </p:spPr>
+        <p:style>
+          <a:lnRef idx="2">
+            <a:schemeClr val="accent1">
+              <a:shade val="50000"/>
+            </a:schemeClr>
+          </a:lnRef>
+          <a:fillRef idx="1">
+            <a:schemeClr val="accent1"/>
+          </a:fillRef>
+          <a:effectRef idx="0">
+            <a:schemeClr val="accent1"/>
+          </a:effectRef>
+          <a:fontRef idx="minor">
+            <a:schemeClr val="lt1"/>
+          </a:fontRef>
+        </p:style>
+        <p:txBody>
+          <a:bodyPr rtlCol="0" anchor="ctr"/>
+          <a:lstStyle/>
+          <a:p>
+            <a:pPr algn="ctr"/>
+            <a:endParaRPr lang="en-US"/>
+          </a:p>
+        </p:txBody>
+      </p:sp>
+      <p:sp>
+        <p:nvSpPr>
+          <p:cNvPr id="12" name="Rectangle 11">
+            <a:extLst>
+              <a:ext uri="{FF2B5EF4-FFF2-40B4-BE49-F238E27FC236}">
+                <a16:creationId xmlns:a16="http://schemas.microsoft.com/office/drawing/2014/main" id="{2633B3B5-CC90-43F0-8714-D31D1F3F0209}"/>
+              </a:ext>
+              <a:ext uri="{C183D7F6-B498-43B3-948B-1728B52AA6E4}">
+                <adec:decorative xmlns:adec="http://schemas.microsoft.com/office/drawing/2017/decorative" val="1"/>
+              </a:ext>
+            </a:extLst>
+          </p:cNvPr>
+          <p:cNvSpPr>
+            <a:spLocks noGrp="1" noRot="1" noChangeAspect="1" noMove="1" noResize="1" noEditPoints="1" noAdjustHandles="1" noChangeArrowheads="1" noChangeShapeType="1" noTextEdit="1"/>
+          </p:cNvSpPr>
+          <p:nvPr>
+            <p:extLst>
+              <p:ext uri="{386F3935-93C4-4BCD-93E2-E3B085C9AB24}">
+                <p16:designElem xmlns:p16="http://schemas.microsoft.com/office/powerpoint/2015/main" val="1"/>
+              </p:ext>
+            </p:extLst>
+          </p:nvPr>
+        </p:nvSpPr>
+        <p:spPr>
+          <a:xfrm rot="10800000" flipH="1">
+            <a:off x="-2311" y="0"/>
+            <a:ext cx="9070846" cy="6857572"/>
+          </a:xfrm>
+          <a:prstGeom prst="rect">
+            <a:avLst/>
+          </a:prstGeom>
+          <a:gradFill>
+            <a:gsLst>
+              <a:gs pos="8000">
+                <a:srgbClr val="000000">
+                  <a:alpha val="52000"/>
+                </a:srgbClr>
+              </a:gs>
+              <a:gs pos="100000">
+                <a:schemeClr val="accent1"/>
+              </a:gs>
+            </a:gsLst>
+            <a:lin ang="4800000" scaled="0"/>
+          </a:gradFill>
+          <a:ln>
+            <a:noFill/>
+          </a:ln>
+        </p:spPr>
+        <p:style>
+          <a:lnRef idx="2">
+            <a:schemeClr val="accent1">
+              <a:shade val="50000"/>
+            </a:schemeClr>
+          </a:lnRef>
+          <a:fillRef idx="1">
+            <a:schemeClr val="accent1"/>
+          </a:fillRef>
+          <a:effectRef idx="0">
+            <a:schemeClr val="accent1"/>
+          </a:effectRef>
+          <a:fontRef idx="minor">
+            <a:schemeClr val="lt1"/>
+          </a:fontRef>
+        </p:style>
+        <p:txBody>
+          <a:bodyPr rtlCol="0" anchor="ctr"/>
+          <a:lstStyle/>
+          <a:p>
+            <a:pPr algn="ctr"/>
+            <a:endParaRPr lang="en-US"/>
+          </a:p>
+        </p:txBody>
+      </p:sp>
+      <p:sp>
+        <p:nvSpPr>
+          <p:cNvPr id="14" name="Rectangle 13">
+            <a:extLst>
+              <a:ext uri="{FF2B5EF4-FFF2-40B4-BE49-F238E27FC236}">
+                <a16:creationId xmlns:a16="http://schemas.microsoft.com/office/drawing/2014/main" id="{A8D57A06-A426-446D-B02C-A2DC6B62E45E}"/>
+              </a:ext>
+              <a:ext uri="{C183D7F6-B498-43B3-948B-1728B52AA6E4}">
+                <adec:decorative xmlns:adec="http://schemas.microsoft.com/office/drawing/2017/decorative" val="1"/>
+              </a:ext>
+            </a:extLst>
+          </p:cNvPr>
+          <p:cNvSpPr>
+            <a:spLocks noGrp="1" noRot="1" noChangeAspect="1" noMove="1" noResize="1" noEditPoints="1" noAdjustHandles="1" noChangeArrowheads="1" noChangeShapeType="1" noTextEdit="1"/>
+          </p:cNvSpPr>
+          <p:nvPr>
+            <p:extLst>
+              <p:ext uri="{386F3935-93C4-4BCD-93E2-E3B085C9AB24}">
+                <p16:designElem xmlns:p16="http://schemas.microsoft.com/office/powerpoint/2015/main" val="1"/>
+              </p:ext>
+            </p:extLst>
+          </p:nvPr>
+        </p:nvSpPr>
+        <p:spPr>
+          <a:xfrm rot="16200000" flipH="1">
+            <a:off x="3649491" y="-1685840"/>
+            <a:ext cx="4894564" cy="12193546"/>
+          </a:xfrm>
+          <a:prstGeom prst="rect">
+            <a:avLst/>
+          </a:prstGeom>
+          <a:gradFill>
+            <a:gsLst>
+              <a:gs pos="0">
+                <a:schemeClr val="accent5">
+                  <a:lumMod val="60000"/>
+                  <a:lumOff val="40000"/>
+                  <a:alpha val="0"/>
+                </a:schemeClr>
+              </a:gs>
+              <a:gs pos="100000">
+                <a:srgbClr val="000000">
+                  <a:alpha val="46000"/>
+                </a:srgbClr>
+              </a:gs>
+            </a:gsLst>
+            <a:lin ang="1200000" scaled="0"/>
+          </a:gradFill>
+          <a:ln>
+            <a:noFill/>
+          </a:ln>
+        </p:spPr>
+        <p:style>
+          <a:lnRef idx="2">
+            <a:schemeClr val="accent1">
+              <a:shade val="50000"/>
+            </a:schemeClr>
+          </a:lnRef>
+          <a:fillRef idx="1">
+            <a:schemeClr val="accent1"/>
+          </a:fillRef>
+          <a:effectRef idx="0">
+            <a:schemeClr val="accent1"/>
+          </a:effectRef>
+          <a:fontRef idx="minor">
+            <a:schemeClr val="lt1"/>
+          </a:fontRef>
+        </p:style>
+        <p:txBody>
+          <a:bodyPr rtlCol="0" anchor="ctr"/>
+          <a:lstStyle/>
+          <a:p>
+            <a:pPr algn="ctr"/>
+            <a:endParaRPr lang="en-US"/>
+          </a:p>
+        </p:txBody>
+      </p:sp>
       <p:pic>
         <p:nvPicPr>
           <p:cNvPr id="3" name="Picture 2">
@@ -3896,15 +7012,15 @@
           <p:nvPr/>
         </p:nvPicPr>
         <p:blipFill>
-          <a:blip r:embed="rId2"/>
+          <a:blip r:embed="rId3"/>
           <a:stretch>
             <a:fillRect/>
           </a:stretch>
         </p:blipFill>
         <p:spPr>
           <a:xfrm>
-            <a:off x="827107" y="800100"/>
-            <a:ext cx="10537785" cy="5257800"/>
+            <a:off x="457200" y="609600"/>
+            <a:ext cx="11277600" cy="5638800"/>
           </a:xfrm>
           <a:prstGeom prst="rect">
             <a:avLst/>
@@ -4237,4 +7353,319 @@
     </a:ext>
   </a:extLst>
 </a:theme>
+</file>
+
+<file path=ppt/theme/theme2.xml><?xml version="1.0" encoding="utf-8"?>
+<a:theme xmlns:a="http://schemas.openxmlformats.org/drawingml/2006/main" name="Office Theme">
+  <a:themeElements>
+    <a:clrScheme name="Office">
+      <a:dk1>
+        <a:sysClr val="windowText" lastClr="000000"/>
+      </a:dk1>
+      <a:lt1>
+        <a:sysClr val="window" lastClr="FFFFFF"/>
+      </a:lt1>
+      <a:dk2>
+        <a:srgbClr val="0E2841"/>
+      </a:dk2>
+      <a:lt2>
+        <a:srgbClr val="E8E8E8"/>
+      </a:lt2>
+      <a:accent1>
+        <a:srgbClr val="156082"/>
+      </a:accent1>
+      <a:accent2>
+        <a:srgbClr val="E97132"/>
+      </a:accent2>
+      <a:accent3>
+        <a:srgbClr val="196B24"/>
+      </a:accent3>
+      <a:accent4>
+        <a:srgbClr val="0F9ED5"/>
+      </a:accent4>
+      <a:accent5>
+        <a:srgbClr val="A02B93"/>
+      </a:accent5>
+      <a:accent6>
+        <a:srgbClr val="4EA72E"/>
+      </a:accent6>
+      <a:hlink>
+        <a:srgbClr val="467886"/>
+      </a:hlink>
+      <a:folHlink>
+        <a:srgbClr val="96607D"/>
+      </a:folHlink>
+    </a:clrScheme>
+    <a:fontScheme name="Office">
+      <a:majorFont>
+        <a:latin typeface="Aptos Display" panose="02110004020202020204"/>
+        <a:ea typeface=""/>
+        <a:cs typeface=""/>
+        <a:font script="Jpan" typeface="游ゴシック Light"/>
+        <a:font script="Hang" typeface="맑은 고딕"/>
+        <a:font script="Hans" typeface="等线 Light"/>
+        <a:font script="Hant" typeface="新細明體"/>
+        <a:font script="Arab" typeface="Times New Roman"/>
+        <a:font script="Hebr" typeface="Times New Roman"/>
+        <a:font script="Thai" typeface="Angsana New"/>
+        <a:font script="Ethi" typeface="Nyala"/>
+        <a:font script="Beng" typeface="Vrinda"/>
+        <a:font script="Gujr" typeface="Shruti"/>
+        <a:font script="Khmr" typeface="MoolBoran"/>
+        <a:font script="Knda" typeface="Tunga"/>
+        <a:font script="Guru" typeface="Raavi"/>
+        <a:font script="Cans" typeface="Euphemia"/>
+        <a:font script="Cher" typeface="Plantagenet Cherokee"/>
+        <a:font script="Yiii" typeface="Microsoft Yi Baiti"/>
+        <a:font script="Tibt" typeface="Microsoft Himalaya"/>
+        <a:font script="Thaa" typeface="MV Boli"/>
+        <a:font script="Deva" typeface="Mangal"/>
+        <a:font script="Telu" typeface="Gautami"/>
+        <a:font script="Taml" typeface="Latha"/>
+        <a:font script="Syrc" typeface="Estrangelo Edessa"/>
+        <a:font script="Orya" typeface="Kalinga"/>
+        <a:font script="Mlym" typeface="Kartika"/>
+        <a:font script="Laoo" typeface="DokChampa"/>
+        <a:font script="Sinh" typeface="Iskoola Pota"/>
+        <a:font script="Mong" typeface="Mongolian Baiti"/>
+        <a:font script="Viet" typeface="Times New Roman"/>
+        <a:font script="Uigh" typeface="Microsoft Uighur"/>
+        <a:font script="Geor" typeface="Sylfaen"/>
+        <a:font script="Armn" typeface="Arial"/>
+        <a:font script="Bugi" typeface="Leelawadee UI"/>
+        <a:font script="Bopo" typeface="Microsoft JhengHei"/>
+        <a:font script="Java" typeface="Javanese Text"/>
+        <a:font script="Lisu" typeface="Segoe UI"/>
+        <a:font script="Mymr" typeface="Myanmar Text"/>
+        <a:font script="Nkoo" typeface="Ebrima"/>
+        <a:font script="Olck" typeface="Nirmala UI"/>
+        <a:font script="Osma" typeface="Ebrima"/>
+        <a:font script="Phag" typeface="Phagspa"/>
+        <a:font script="Syrn" typeface="Estrangelo Edessa"/>
+        <a:font script="Syrj" typeface="Estrangelo Edessa"/>
+        <a:font script="Syre" typeface="Estrangelo Edessa"/>
+        <a:font script="Sora" typeface="Nirmala UI"/>
+        <a:font script="Tale" typeface="Microsoft Tai Le"/>
+        <a:font script="Talu" typeface="Microsoft New Tai Lue"/>
+        <a:font script="Tfng" typeface="Ebrima"/>
+      </a:majorFont>
+      <a:minorFont>
+        <a:latin typeface="Aptos" panose="02110004020202020204"/>
+        <a:ea typeface=""/>
+        <a:cs typeface=""/>
+        <a:font script="Jpan" typeface="游ゴシック"/>
+        <a:font script="Hang" typeface="맑은 고딕"/>
+        <a:font script="Hans" typeface="等线"/>
+        <a:font script="Hant" typeface="新細明體"/>
+        <a:font script="Arab" typeface="Arial"/>
+        <a:font script="Hebr" typeface="Arial"/>
+        <a:font script="Thai" typeface="Cordia New"/>
+        <a:font script="Ethi" typeface="Nyala"/>
+        <a:font script="Beng" typeface="Vrinda"/>
+        <a:font script="Gujr" typeface="Shruti"/>
+        <a:font script="Khmr" typeface="DaunPenh"/>
+        <a:font script="Knda" typeface="Tunga"/>
+        <a:font script="Guru" typeface="Raavi"/>
+        <a:font script="Cans" typeface="Euphemia"/>
+        <a:font script="Cher" typeface="Plantagenet Cherokee"/>
+        <a:font script="Yiii" typeface="Microsoft Yi Baiti"/>
+        <a:font script="Tibt" typeface="Microsoft Himalaya"/>
+        <a:font script="Thaa" typeface="MV Boli"/>
+        <a:font script="Deva" typeface="Mangal"/>
+        <a:font script="Telu" typeface="Gautami"/>
+        <a:font script="Taml" typeface="Latha"/>
+        <a:font script="Syrc" typeface="Estrangelo Edessa"/>
+        <a:font script="Orya" typeface="Kalinga"/>
+        <a:font script="Mlym" typeface="Kartika"/>
+        <a:font script="Laoo" typeface="DokChampa"/>
+        <a:font script="Sinh" typeface="Iskoola Pota"/>
+        <a:font script="Mong" typeface="Mongolian Baiti"/>
+        <a:font script="Viet" typeface="Arial"/>
+        <a:font script="Uigh" typeface="Microsoft Uighur"/>
+        <a:font script="Geor" typeface="Sylfaen"/>
+        <a:font script="Armn" typeface="Arial"/>
+        <a:font script="Bugi" typeface="Leelawadee UI"/>
+        <a:font script="Bopo" typeface="Microsoft JhengHei"/>
+        <a:font script="Java" typeface="Javanese Text"/>
+        <a:font script="Lisu" typeface="Segoe UI"/>
+        <a:font script="Mymr" typeface="Myanmar Text"/>
+        <a:font script="Nkoo" typeface="Ebrima"/>
+        <a:font script="Olck" typeface="Nirmala UI"/>
+        <a:font script="Osma" typeface="Ebrima"/>
+        <a:font script="Phag" typeface="Phagspa"/>
+        <a:font script="Syrn" typeface="Estrangelo Edessa"/>
+        <a:font script="Syrj" typeface="Estrangelo Edessa"/>
+        <a:font script="Syre" typeface="Estrangelo Edessa"/>
+        <a:font script="Sora" typeface="Nirmala UI"/>
+        <a:font script="Tale" typeface="Microsoft Tai Le"/>
+        <a:font script="Talu" typeface="Microsoft New Tai Lue"/>
+        <a:font script="Tfng" typeface="Ebrima"/>
+      </a:minorFont>
+    </a:fontScheme>
+    <a:fmtScheme name="Office">
+      <a:fillStyleLst>
+        <a:solidFill>
+          <a:schemeClr val="phClr"/>
+        </a:solidFill>
+        <a:gradFill rotWithShape="1">
+          <a:gsLst>
+            <a:gs pos="0">
+              <a:schemeClr val="phClr">
+                <a:lumMod val="110000"/>
+                <a:satMod val="105000"/>
+                <a:tint val="67000"/>
+              </a:schemeClr>
+            </a:gs>
+            <a:gs pos="50000">
+              <a:schemeClr val="phClr">
+                <a:lumMod val="105000"/>
+                <a:satMod val="103000"/>
+                <a:tint val="73000"/>
+              </a:schemeClr>
+            </a:gs>
+            <a:gs pos="100000">
+              <a:schemeClr val="phClr">
+                <a:lumMod val="105000"/>
+                <a:satMod val="109000"/>
+                <a:tint val="81000"/>
+              </a:schemeClr>
+            </a:gs>
+          </a:gsLst>
+          <a:lin ang="5400000" scaled="0"/>
+        </a:gradFill>
+        <a:gradFill rotWithShape="1">
+          <a:gsLst>
+            <a:gs pos="0">
+              <a:schemeClr val="phClr">
+                <a:satMod val="103000"/>
+                <a:lumMod val="102000"/>
+                <a:tint val="94000"/>
+              </a:schemeClr>
+            </a:gs>
+            <a:gs pos="50000">
+              <a:schemeClr val="phClr">
+                <a:satMod val="110000"/>
+                <a:lumMod val="100000"/>
+                <a:shade val="100000"/>
+              </a:schemeClr>
+            </a:gs>
+            <a:gs pos="100000">
+              <a:schemeClr val="phClr">
+                <a:lumMod val="99000"/>
+                <a:satMod val="120000"/>
+                <a:shade val="78000"/>
+              </a:schemeClr>
+            </a:gs>
+          </a:gsLst>
+          <a:lin ang="5400000" scaled="0"/>
+        </a:gradFill>
+      </a:fillStyleLst>
+      <a:lnStyleLst>
+        <a:ln w="12700" cap="flat" cmpd="sng" algn="ctr">
+          <a:solidFill>
+            <a:schemeClr val="phClr"/>
+          </a:solidFill>
+          <a:prstDash val="solid"/>
+          <a:miter lim="800000"/>
+        </a:ln>
+        <a:ln w="19050" cap="flat" cmpd="sng" algn="ctr">
+          <a:solidFill>
+            <a:schemeClr val="phClr"/>
+          </a:solidFill>
+          <a:prstDash val="solid"/>
+          <a:miter lim="800000"/>
+        </a:ln>
+        <a:ln w="25400" cap="flat" cmpd="sng" algn="ctr">
+          <a:solidFill>
+            <a:schemeClr val="phClr"/>
+          </a:solidFill>
+          <a:prstDash val="solid"/>
+          <a:miter lim="800000"/>
+        </a:ln>
+      </a:lnStyleLst>
+      <a:effectStyleLst>
+        <a:effectStyle>
+          <a:effectLst/>
+        </a:effectStyle>
+        <a:effectStyle>
+          <a:effectLst/>
+        </a:effectStyle>
+        <a:effectStyle>
+          <a:effectLst>
+            <a:outerShdw blurRad="57150" dist="19050" dir="5400000" algn="ctr" rotWithShape="0">
+              <a:srgbClr val="000000">
+                <a:alpha val="63000"/>
+              </a:srgbClr>
+            </a:outerShdw>
+          </a:effectLst>
+        </a:effectStyle>
+      </a:effectStyleLst>
+      <a:bgFillStyleLst>
+        <a:solidFill>
+          <a:schemeClr val="phClr"/>
+        </a:solidFill>
+        <a:solidFill>
+          <a:schemeClr val="phClr">
+            <a:tint val="95000"/>
+            <a:satMod val="170000"/>
+          </a:schemeClr>
+        </a:solidFill>
+        <a:gradFill rotWithShape="1">
+          <a:gsLst>
+            <a:gs pos="0">
+              <a:schemeClr val="phClr">
+                <a:tint val="93000"/>
+                <a:satMod val="150000"/>
+                <a:shade val="98000"/>
+                <a:lumMod val="102000"/>
+              </a:schemeClr>
+            </a:gs>
+            <a:gs pos="50000">
+              <a:schemeClr val="phClr">
+                <a:tint val="98000"/>
+                <a:satMod val="130000"/>
+                <a:shade val="90000"/>
+                <a:lumMod val="103000"/>
+              </a:schemeClr>
+            </a:gs>
+            <a:gs pos="100000">
+              <a:schemeClr val="phClr">
+                <a:shade val="63000"/>
+                <a:satMod val="120000"/>
+              </a:schemeClr>
+            </a:gs>
+          </a:gsLst>
+          <a:lin ang="5400000" scaled="0"/>
+        </a:gradFill>
+      </a:bgFillStyleLst>
+    </a:fmtScheme>
+  </a:themeElements>
+  <a:objectDefaults>
+    <a:lnDef>
+      <a:spPr/>
+      <a:bodyPr/>
+      <a:lstStyle/>
+      <a:style>
+        <a:lnRef idx="2">
+          <a:schemeClr val="accent1"/>
+        </a:lnRef>
+        <a:fillRef idx="0">
+          <a:schemeClr val="accent1"/>
+        </a:fillRef>
+        <a:effectRef idx="1">
+          <a:schemeClr val="accent1"/>
+        </a:effectRef>
+        <a:fontRef idx="minor">
+          <a:schemeClr val="tx1"/>
+        </a:fontRef>
+      </a:style>
+    </a:lnDef>
+  </a:objectDefaults>
+  <a:extraClrSchemeLst/>
+  <a:extLst>
+    <a:ext uri="{05A4C25C-085E-4340-85A3-A5531E510DB2}">
+      <thm15:themeFamily xmlns:thm15="http://schemas.microsoft.com/office/thememl/2012/main" name="Office Theme" id="{2E142A2C-CD16-42D6-873A-C26D2A0506FA}" vid="{1BDDFF52-6CD6-40A5-AB3C-68EB2F1E4D0A}"/>
+    </a:ext>
+  </a:extLst>
+</a:theme>
 </file>
--- a/project/stage04/Projekt hurtowni danych.pptx
+++ b/project/stage04/Projekt hurtowni danych.pptx
@@ -5,16 +5,17 @@
     <p:sldMasterId id="2147483648" r:id="rId1"/>
   </p:sldMasterIdLst>
   <p:notesMasterIdLst>
-    <p:notesMasterId r:id="rId9"/>
+    <p:notesMasterId r:id="rId10"/>
   </p:notesMasterIdLst>
   <p:sldIdLst>
     <p:sldId id="256" r:id="rId2"/>
     <p:sldId id="257" r:id="rId3"/>
     <p:sldId id="258" r:id="rId4"/>
-    <p:sldId id="259" r:id="rId5"/>
-    <p:sldId id="260" r:id="rId6"/>
-    <p:sldId id="261" r:id="rId7"/>
-    <p:sldId id="262" r:id="rId8"/>
+    <p:sldId id="263" r:id="rId5"/>
+    <p:sldId id="259" r:id="rId6"/>
+    <p:sldId id="260" r:id="rId7"/>
+    <p:sldId id="261" r:id="rId8"/>
+    <p:sldId id="262" r:id="rId9"/>
   </p:sldIdLst>
   <p:sldSz cx="12192000" cy="6858000"/>
   <p:notesSz cx="6858000" cy="9144000"/>
@@ -536,7 +537,7 @@
           <a:p>
             <a:fld id="{028B4CE3-0D44-4C07-90A8-72C114EE772D}" type="slidenum">
               <a:rPr lang="pl-PL" smtClean="0"/>
-              <a:t>7</a:t>
+              <a:t>8</a:t>
             </a:fld>
             <a:endParaRPr lang="pl-PL"/>
           </a:p>
@@ -5557,6 +5558,164 @@
 <file path=ppt/slides/slide4.xml><?xml version="1.0" encoding="utf-8"?>
 <p:sld xmlns:a="http://schemas.openxmlformats.org/drawingml/2006/main" xmlns:r="http://schemas.openxmlformats.org/officeDocument/2006/relationships" xmlns:p="http://schemas.openxmlformats.org/presentationml/2006/main">
   <p:cSld>
+    <p:spTree>
+      <p:nvGrpSpPr>
+        <p:cNvPr id="1" name=""/>
+        <p:cNvGrpSpPr/>
+        <p:nvPr/>
+      </p:nvGrpSpPr>
+      <p:grpSpPr>
+        <a:xfrm>
+          <a:off x="0" y="0"/>
+          <a:ext cx="0" cy="0"/>
+          <a:chOff x="0" y="0"/>
+          <a:chExt cx="0" cy="0"/>
+        </a:xfrm>
+      </p:grpSpPr>
+      <p:sp>
+        <p:nvSpPr>
+          <p:cNvPr id="2" name="Title 1">
+            <a:extLst>
+              <a:ext uri="{FF2B5EF4-FFF2-40B4-BE49-F238E27FC236}">
+                <a16:creationId xmlns:a16="http://schemas.microsoft.com/office/drawing/2014/main" id="{E0DF754A-C7C2-3C17-1F8C-F5ECD7F1860C}"/>
+              </a:ext>
+            </a:extLst>
+          </p:cNvPr>
+          <p:cNvSpPr>
+            <a:spLocks noGrp="1"/>
+          </p:cNvSpPr>
+          <p:nvPr>
+            <p:ph type="title"/>
+          </p:nvPr>
+        </p:nvSpPr>
+        <p:spPr/>
+        <p:txBody>
+          <a:bodyPr/>
+          <a:lstStyle/>
+          <a:p>
+            <a:r>
+              <a:rPr lang="pl-PL" dirty="0"/>
+              <a:t>KPI</a:t>
+            </a:r>
+          </a:p>
+        </p:txBody>
+      </p:sp>
+      <p:pic>
+        <p:nvPicPr>
+          <p:cNvPr id="5" name="Content Placeholder 4">
+            <a:extLst>
+              <a:ext uri="{FF2B5EF4-FFF2-40B4-BE49-F238E27FC236}">
+                <a16:creationId xmlns:a16="http://schemas.microsoft.com/office/drawing/2014/main" id="{6832C6D4-23EC-60D3-414B-807873B8C6D6}"/>
+              </a:ext>
+            </a:extLst>
+          </p:cNvPr>
+          <p:cNvPicPr>
+            <a:picLocks noGrp="1" noChangeAspect="1"/>
+          </p:cNvPicPr>
+          <p:nvPr>
+            <p:ph idx="1"/>
+          </p:nvPr>
+        </p:nvPicPr>
+        <p:blipFill>
+          <a:blip r:embed="rId2"/>
+          <a:stretch>
+            <a:fillRect/>
+          </a:stretch>
+        </p:blipFill>
+        <p:spPr>
+          <a:xfrm>
+            <a:off x="4961300" y="1186157"/>
+            <a:ext cx="6839460" cy="4963819"/>
+          </a:xfrm>
+        </p:spPr>
+      </p:pic>
+      <p:sp>
+        <p:nvSpPr>
+          <p:cNvPr id="6" name="TextBox 5">
+            <a:extLst>
+              <a:ext uri="{FF2B5EF4-FFF2-40B4-BE49-F238E27FC236}">
+                <a16:creationId xmlns:a16="http://schemas.microsoft.com/office/drawing/2014/main" id="{1D0EB718-F5DE-BC11-9966-16E87D6EFFF4}"/>
+              </a:ext>
+            </a:extLst>
+          </p:cNvPr>
+          <p:cNvSpPr txBox="1"/>
+          <p:nvPr/>
+        </p:nvSpPr>
+        <p:spPr>
+          <a:xfrm>
+            <a:off x="316871" y="1978524"/>
+            <a:ext cx="4879818" cy="3693319"/>
+          </a:xfrm>
+          <a:prstGeom prst="rect">
+            <a:avLst/>
+          </a:prstGeom>
+          <a:noFill/>
+        </p:spPr>
+        <p:txBody>
+          <a:bodyPr wrap="square" rtlCol="0">
+            <a:spAutoFit/>
+          </a:bodyPr>
+          <a:lstStyle/>
+          <a:p>
+            <a:r>
+              <a:rPr lang="pl-PL" dirty="0"/>
+              <a:t>Constructor Reliability KPI (niezawodność konstruktora)</a:t>
+            </a:r>
+          </a:p>
+          <a:p>
+            <a:endParaRPr lang="pl-PL" dirty="0"/>
+          </a:p>
+          <a:p>
+            <a:r>
+              <a:rPr lang="pl-PL" dirty="0"/>
+              <a:t>Wartość: 1 – DNF Percentage</a:t>
+            </a:r>
+          </a:p>
+          <a:p>
+            <a:endParaRPr lang="pl-PL" dirty="0"/>
+          </a:p>
+          <a:p>
+            <a:r>
+              <a:rPr lang="pl-PL" dirty="0"/>
+              <a:t>Cel: 80%</a:t>
+            </a:r>
+          </a:p>
+          <a:p>
+            <a:endParaRPr lang="pl-PL" dirty="0"/>
+          </a:p>
+          <a:p>
+            <a:r>
+              <a:rPr lang="pl-PL" dirty="0"/>
+              <a:t>Status: Ocena, czy konstruktor osiąga zakładany poziom niezawodności</a:t>
+            </a:r>
+          </a:p>
+          <a:p>
+            <a:endParaRPr lang="pl-PL" dirty="0"/>
+          </a:p>
+          <a:p>
+            <a:r>
+              <a:rPr lang="pl-PL" dirty="0"/>
+              <a:t>Trend: czy wartość zwiększyła się, czy zmniejszyła w porównaniu z poprzednim odpowiednikiem okresu</a:t>
+            </a:r>
+          </a:p>
+        </p:txBody>
+      </p:sp>
+    </p:spTree>
+    <p:extLst>
+      <p:ext uri="{BB962C8B-B14F-4D97-AF65-F5344CB8AC3E}">
+        <p14:creationId xmlns:p14="http://schemas.microsoft.com/office/powerpoint/2010/main" val="2226405044"/>
+      </p:ext>
+    </p:extLst>
+  </p:cSld>
+  <p:clrMapOvr>
+    <a:masterClrMapping/>
+  </p:clrMapOvr>
+</p:sld>
+</file>
+
+<file path=ppt/slides/slide5.xml><?xml version="1.0" encoding="utf-8"?>
+<p:sld xmlns:a="http://schemas.openxmlformats.org/drawingml/2006/main" xmlns:r="http://schemas.openxmlformats.org/officeDocument/2006/relationships" xmlns:p="http://schemas.openxmlformats.org/presentationml/2006/main">
+  <p:cSld>
     <p:bg>
       <p:bgPr>
         <a:solidFill>
@@ -5921,7 +6080,7 @@
 </p:sld>
 </file>
 
-<file path=ppt/slides/slide5.xml><?xml version="1.0" encoding="utf-8"?>
+<file path=ppt/slides/slide6.xml><?xml version="1.0" encoding="utf-8"?>
 <p:sld xmlns:a="http://schemas.openxmlformats.org/drawingml/2006/main" xmlns:r="http://schemas.openxmlformats.org/officeDocument/2006/relationships" xmlns:p="http://schemas.openxmlformats.org/presentationml/2006/main">
   <p:cSld>
     <p:bg>
@@ -6294,7 +6453,7 @@
 </p:sld>
 </file>
 
-<file path=ppt/slides/slide6.xml><?xml version="1.0" encoding="utf-8"?>
+<file path=ppt/slides/slide7.xml><?xml version="1.0" encoding="utf-8"?>
 <p:sld xmlns:a="http://schemas.openxmlformats.org/drawingml/2006/main" xmlns:r="http://schemas.openxmlformats.org/officeDocument/2006/relationships" xmlns:p="http://schemas.openxmlformats.org/presentationml/2006/main">
   <p:cSld>
     <p:bg>
@@ -6667,7 +6826,7 @@
 </p:sld>
 </file>
 
-<file path=ppt/slides/slide7.xml><?xml version="1.0" encoding="utf-8"?>
+<file path=ppt/slides/slide8.xml><?xml version="1.0" encoding="utf-8"?>
 <p:sld xmlns:a="http://schemas.openxmlformats.org/drawingml/2006/main" xmlns:r="http://schemas.openxmlformats.org/officeDocument/2006/relationships" xmlns:p="http://schemas.openxmlformats.org/presentationml/2006/main">
   <p:cSld>
     <p:bg>
